--- a/applications/whs/documents/whs_ppt.pptx
+++ b/applications/whs/documents/whs_ppt.pptx
@@ -12,9 +12,6 @@
     <p:sldId id="260" r:id="rId11"/>
     <p:sldId id="261" r:id="rId12"/>
     <p:sldId id="262" r:id="rId13"/>
-    <p:sldId id="263" r:id="rId14"/>
-    <p:sldId id="264" r:id="rId15"/>
-    <p:sldId id="265" r:id="rId16"/>
   </p:sldIdLst>
   <p:sldSz cx="12191695" cy="6858000" type="screen4x3"/>
   <p:notesSz cx="6858000" cy="9144000"/>
@@ -3107,15 +3104,14 @@
         </p:nvPicPr>
         <p:blipFill>
           <a:blip r:embed="rId2"/>
-          <a:srcRect l="33" r="33"/>
           <a:stretch>
             <a:fillRect/>
           </a:stretch>
         </p:blipFill>
         <p:spPr>
           <a:xfrm>
-            <a:off x="0" y="0"/>
-            <a:ext cx="12191695" cy="6858000"/>
+            <a:off x="0" y="2263"/>
+            <a:ext cx="12191695" cy="6853474"/>
           </a:xfrm>
           <a:prstGeom prst="rect">
             <a:avLst/>
@@ -3130,8 +3126,8 @@
         </p:nvSpPr>
         <p:spPr>
           <a:xfrm>
-            <a:off x="0" y="3474720"/>
-            <a:ext cx="12191695" cy="3383280"/>
+            <a:off x="0" y="4114800"/>
+            <a:ext cx="12191695" cy="2743200"/>
           </a:xfrm>
           <a:prstGeom prst="rect">
             <a:avLst/>
@@ -3142,7 +3138,6 @@
           <a:ln>
             <a:noFill/>
           </a:ln>
-          <a:effectLst/>
         </p:spPr>
         <p:style>
           <a:lnRef idx="1">
@@ -3174,7 +3169,7 @@
         </p:nvSpPr>
         <p:spPr>
           <a:xfrm>
-            <a:off x="594360" y="3749040"/>
+            <a:off x="502920" y="4343400"/>
             <a:ext cx="10972800" cy="320040"/>
           </a:xfrm>
           <a:prstGeom prst="rect">
@@ -3183,24 +3178,20 @@
           <a:noFill/>
         </p:spPr>
         <p:txBody>
-          <a:bodyPr wrap="square" anchor="t">
+          <a:bodyPr wrap="square">
             <a:spAutoFit/>
           </a:bodyPr>
           <a:lstStyle/>
           <a:p>
-            <a:pPr algn="l">
-              <a:spcAft>
-                <a:spcPts val="0"/>
-              </a:spcAft>
-            </a:pPr>
-            <a:r>
-              <a:rPr sz="1300" b="1" i="0">
+            <a:pPr algn="l"/>
+            <a:r>
+              <a:rPr sz="1200" b="1" i="0">
                 <a:solidFill>
-                  <a:srgbClr val="14A3A3"/>
+                  <a:srgbClr val="0D6E6E"/>
                 </a:solidFill>
                 <a:latin typeface="Calibri"/>
               </a:rPr>
-              <a:t>World Health Summit 2026 Youth Group Opportunity (Berlin)</a:t>
+              <a:t>World Health Summit 2026 — Youth Group Opportunity (Berlin)</a:t>
             </a:r>
           </a:p>
         </p:txBody>
@@ -3213,8 +3204,8 @@
         </p:nvSpPr>
         <p:spPr>
           <a:xfrm>
-            <a:off x="594360" y="4206240"/>
-            <a:ext cx="10972800" cy="640080"/>
+            <a:off x="502920" y="4800600"/>
+            <a:ext cx="10972800" cy="594360"/>
           </a:xfrm>
           <a:prstGeom prst="rect">
             <a:avLst/>
@@ -3222,16 +3213,12 @@
           <a:noFill/>
         </p:spPr>
         <p:txBody>
-          <a:bodyPr wrap="square" anchor="t">
+          <a:bodyPr wrap="square">
             <a:spAutoFit/>
           </a:bodyPr>
           <a:lstStyle/>
           <a:p>
-            <a:pPr algn="l">
-              <a:spcAft>
-                <a:spcPts val="0"/>
-              </a:spcAft>
-            </a:pPr>
+            <a:pPr algn="l"/>
             <a:r>
               <a:rPr sz="2600" b="1" i="0">
                 <a:solidFill>
@@ -3239,7 +3226,7 @@
                 </a:solidFill>
                 <a:latin typeface="Calibri"/>
               </a:rPr>
-              <a:t>FairBanks Youth Delegation to WHS 2026</a:t>
+              <a:t>FairBanks Youth Delegation Application</a:t>
             </a:r>
           </a:p>
         </p:txBody>
@@ -3252,7 +3239,7 @@
         </p:nvSpPr>
         <p:spPr>
           <a:xfrm>
-            <a:off x="594360" y="4983481"/>
+            <a:off x="502920" y="5532120"/>
             <a:ext cx="10972800" cy="365760"/>
           </a:xfrm>
           <a:prstGeom prst="rect">
@@ -3261,298 +3248,12 @@
           <a:noFill/>
         </p:spPr>
         <p:txBody>
-          <a:bodyPr wrap="square" anchor="t">
+          <a:bodyPr wrap="square">
             <a:spAutoFit/>
           </a:bodyPr>
           <a:lstStyle/>
           <a:p>
-            <a:pPr algn="l">
-              <a:spcAft>
-                <a:spcPts val="0"/>
-              </a:spcAft>
-            </a:pPr>
-            <a:r>
-              <a:rPr sz="1500" b="0" i="1">
-                <a:solidFill>
-                  <a:srgbClr val="F2C79B"/>
-                </a:solidFill>
-                <a:latin typeface="Calibri"/>
-              </a:rPr>
-              <a:t>Complimentary group tickets for youth-led community health voices</a:t>
-            </a:r>
-          </a:p>
-        </p:txBody>
-      </p:sp>
-      <p:sp>
-        <p:nvSpPr>
-          <p:cNvPr id="7" name="TextBox 6"/>
-          <p:cNvSpPr txBox="1"/>
-          <p:nvPr/>
-        </p:nvSpPr>
-        <p:spPr>
-          <a:xfrm>
-            <a:off x="594360" y="5532120"/>
-            <a:ext cx="10972800" cy="274320"/>
-          </a:xfrm>
-          <a:prstGeom prst="rect">
-            <a:avLst/>
-          </a:prstGeom>
-          <a:noFill/>
-        </p:spPr>
-        <p:txBody>
-          <a:bodyPr wrap="square" anchor="t">
-            <a:spAutoFit/>
-          </a:bodyPr>
-          <a:lstStyle/>
-          <a:p>
-            <a:pPr algn="l">
-              <a:spcAft>
-                <a:spcPts val="0"/>
-              </a:spcAft>
-            </a:pPr>
-            <a:r>
-              <a:rPr sz="1300" b="1" i="0">
-                <a:solidFill>
-                  <a:srgbClr val="FFFFFF"/>
-                </a:solidFill>
-                <a:latin typeface="Calibri"/>
-              </a:rPr>
-              <a:t>Your health, our mission.</a:t>
-            </a:r>
-          </a:p>
-        </p:txBody>
-      </p:sp>
-      <p:sp>
-        <p:nvSpPr>
-          <p:cNvPr id="8" name="TextBox 7"/>
-          <p:cNvSpPr txBox="1"/>
-          <p:nvPr/>
-        </p:nvSpPr>
-        <p:spPr>
-          <a:xfrm>
-            <a:off x="594360" y="5989320"/>
-            <a:ext cx="10972800" cy="365760"/>
-          </a:xfrm>
-          <a:prstGeom prst="rect">
-            <a:avLst/>
-          </a:prstGeom>
-          <a:noFill/>
-        </p:spPr>
-        <p:txBody>
-          <a:bodyPr wrap="square" anchor="t">
-            <a:spAutoFit/>
-          </a:bodyPr>
-          <a:lstStyle/>
-          <a:p>
-            <a:pPr algn="l">
-              <a:spcAft>
-                <a:spcPts val="0"/>
-              </a:spcAft>
-            </a:pPr>
-            <a:r>
-              <a:rPr sz="1200" b="0" i="0">
-                <a:solidFill>
-                  <a:srgbClr val="D0E8E8"/>
-                </a:solidFill>
-                <a:latin typeface="Calibri"/>
-              </a:rPr>
-              <a:t>Award complimentary group tickets (3–15) for FairBanks youth delegates.</a:t>
-            </a:r>
-          </a:p>
-        </p:txBody>
-      </p:sp>
-    </p:spTree>
-  </p:cSld>
-  <p:clrMapOvr>
-    <a:masterClrMapping/>
-  </p:clrMapOvr>
-</p:sld>
-</file>
-
-<file path=ppt/slides/slide10.xml><?xml version="1.0" encoding="utf-8"?>
-<p:sld xmlns:a="http://schemas.openxmlformats.org/drawingml/2006/main" xmlns:p="http://schemas.openxmlformats.org/presentationml/2006/main" xmlns:r="http://schemas.openxmlformats.org/officeDocument/2006/relationships">
-  <p:cSld>
-    <p:spTree>
-      <p:nvGrpSpPr>
-        <p:cNvPr id="1" name=""/>
-        <p:cNvGrpSpPr/>
-        <p:nvPr/>
-      </p:nvGrpSpPr>
-      <p:grpSpPr/>
-      <p:pic>
-        <p:nvPicPr>
-          <p:cNvPr id="2" name="Picture 1" descr="outreach_audience_full_group_01_opt.jpg"/>
-          <p:cNvPicPr>
-            <a:picLocks noChangeAspect="1"/>
-          </p:cNvPicPr>
-          <p:nvPr/>
-        </p:nvPicPr>
-        <p:blipFill>
-          <a:blip r:embed="rId2"/>
-          <a:srcRect t="7796" b="7796"/>
-          <a:stretch>
-            <a:fillRect/>
-          </a:stretch>
-        </p:blipFill>
-        <p:spPr>
-          <a:xfrm>
-            <a:off x="0" y="0"/>
-            <a:ext cx="12191695" cy="6858000"/>
-          </a:xfrm>
-          <a:prstGeom prst="rect">
-            <a:avLst/>
-          </a:prstGeom>
-        </p:spPr>
-      </p:pic>
-      <p:sp>
-        <p:nvSpPr>
-          <p:cNvPr id="3" name="Rectangle 2"/>
-          <p:cNvSpPr/>
-          <p:nvPr/>
-        </p:nvSpPr>
-        <p:spPr>
-          <a:xfrm>
-            <a:off x="0" y="3657600"/>
-            <a:ext cx="12191695" cy="3200400"/>
-          </a:xfrm>
-          <a:prstGeom prst="rect">
-            <a:avLst/>
-          </a:prstGeom>
-          <a:solidFill>
-            <a:srgbClr val="0A1F2E"/>
-          </a:solidFill>
-          <a:ln>
-            <a:noFill/>
-          </a:ln>
-          <a:effectLst/>
-        </p:spPr>
-        <p:style>
-          <a:lnRef idx="1">
-            <a:schemeClr val="accent1"/>
-          </a:lnRef>
-          <a:fillRef idx="3">
-            <a:schemeClr val="accent1"/>
-          </a:fillRef>
-          <a:effectRef idx="2">
-            <a:schemeClr val="accent1"/>
-          </a:effectRef>
-          <a:fontRef idx="minor">
-            <a:schemeClr val="lt1"/>
-          </a:fontRef>
-        </p:style>
-        <p:txBody>
-          <a:bodyPr rtlCol="0" anchor="ctr"/>
-          <a:lstStyle/>
-          <a:p>
-            <a:pPr algn="ctr"/>
-          </a:p>
-        </p:txBody>
-      </p:sp>
-      <p:sp>
-        <p:nvSpPr>
-          <p:cNvPr id="4" name="TextBox 3"/>
-          <p:cNvSpPr txBox="1"/>
-          <p:nvPr/>
-        </p:nvSpPr>
-        <p:spPr>
-          <a:xfrm>
-            <a:off x="594360" y="3931920"/>
-            <a:ext cx="10972800" cy="274320"/>
-          </a:xfrm>
-          <a:prstGeom prst="rect">
-            <a:avLst/>
-          </a:prstGeom>
-          <a:noFill/>
-        </p:spPr>
-        <p:txBody>
-          <a:bodyPr wrap="square" anchor="t">
-            <a:spAutoFit/>
-          </a:bodyPr>
-          <a:lstStyle/>
-          <a:p>
-            <a:pPr algn="l">
-              <a:spcAft>
-                <a:spcPts val="0"/>
-              </a:spcAft>
-            </a:pPr>
-            <a:r>
-              <a:rPr sz="1300" b="1" i="0">
-                <a:solidFill>
-                  <a:srgbClr val="14A3A3"/>
-                </a:solidFill>
-                <a:latin typeface="Calibri"/>
-              </a:rPr>
-              <a:t>The ask</a:t>
-            </a:r>
-          </a:p>
-        </p:txBody>
-      </p:sp>
-      <p:sp>
-        <p:nvSpPr>
-          <p:cNvPr id="5" name="TextBox 4"/>
-          <p:cNvSpPr txBox="1"/>
-          <p:nvPr/>
-        </p:nvSpPr>
-        <p:spPr>
-          <a:xfrm>
-            <a:off x="594360" y="4389120"/>
-            <a:ext cx="10972800" cy="822960"/>
-          </a:xfrm>
-          <a:prstGeom prst="rect">
-            <a:avLst/>
-          </a:prstGeom>
-          <a:noFill/>
-        </p:spPr>
-        <p:txBody>
-          <a:bodyPr wrap="square" anchor="t">
-            <a:spAutoFit/>
-          </a:bodyPr>
-          <a:lstStyle/>
-          <a:p>
-            <a:pPr algn="l">
-              <a:spcAft>
-                <a:spcPts val="0"/>
-              </a:spcAft>
-            </a:pPr>
-            <a:r>
-              <a:rPr sz="2200" b="1" i="0">
-                <a:solidFill>
-                  <a:srgbClr val="FFFFFF"/>
-                </a:solidFill>
-                <a:latin typeface="Calibri"/>
-              </a:rPr>
-              <a:t>Award complimentary group tickets (3–15) for FairBanks youth delegates.</a:t>
-            </a:r>
-          </a:p>
-        </p:txBody>
-      </p:sp>
-      <p:sp>
-        <p:nvSpPr>
-          <p:cNvPr id="6" name="TextBox 5"/>
-          <p:cNvSpPr txBox="1"/>
-          <p:nvPr/>
-        </p:nvSpPr>
-        <p:spPr>
-          <a:xfrm>
-            <a:off x="594360" y="5394960"/>
-            <a:ext cx="10972800" cy="365760"/>
-          </a:xfrm>
-          <a:prstGeom prst="rect">
-            <a:avLst/>
-          </a:prstGeom>
-          <a:noFill/>
-        </p:spPr>
-        <p:txBody>
-          <a:bodyPr wrap="square" anchor="t">
-            <a:spAutoFit/>
-          </a:bodyPr>
-          <a:lstStyle/>
-          <a:p>
-            <a:pPr algn="l">
-              <a:spcAft>
-                <a:spcPts val="0"/>
-              </a:spcAft>
-            </a:pPr>
+            <a:pPr algn="l"/>
             <a:r>
               <a:rPr sz="1400" b="0" i="1">
                 <a:solidFill>
@@ -3560,7 +3261,7 @@
                 </a:solidFill>
                 <a:latin typeface="Calibri"/>
               </a:rPr>
-              <a:t>Complimentary group tickets for youth-led community health voices</a:t>
+              <a:t>Learning global prevention practice to strengthen community health at home</a:t>
             </a:r>
           </a:p>
         </p:txBody>
@@ -3573,7 +3274,7 @@
         </p:nvSpPr>
         <p:spPr>
           <a:xfrm>
-            <a:off x="594360" y="5943600"/>
+            <a:off x="502920" y="6080760"/>
             <a:ext cx="10972800" cy="320040"/>
           </a:xfrm>
           <a:prstGeom prst="rect">
@@ -3582,18 +3283,14 @@
           <a:noFill/>
         </p:spPr>
         <p:txBody>
-          <a:bodyPr wrap="square" anchor="t">
+          <a:bodyPr wrap="square">
             <a:spAutoFit/>
           </a:bodyPr>
           <a:lstStyle/>
           <a:p>
-            <a:pPr algn="l">
-              <a:spcAft>
-                <a:spcPts val="0"/>
-              </a:spcAft>
-            </a:pPr>
-            <a:r>
-              <a:rPr sz="1400" b="1" i="0">
+            <a:pPr algn="l"/>
+            <a:r>
+              <a:rPr sz="1300" b="1" i="0">
                 <a:solidFill>
                   <a:srgbClr val="FFFFFF"/>
                 </a:solidFill>
@@ -3631,7 +3328,7 @@
         <p:spPr>
           <a:xfrm>
             <a:off x="0" y="0"/>
-            <a:ext cx="12191695" cy="960120"/>
+            <a:ext cx="12191695" cy="868680"/>
           </a:xfrm>
           <a:prstGeom prst="rect">
             <a:avLst/>
@@ -3642,7 +3339,6 @@
           <a:ln>
             <a:noFill/>
           </a:ln>
-          <a:effectLst/>
         </p:spPr>
         <p:style>
           <a:lnRef idx="1">
@@ -3675,18 +3371,17 @@
         <p:spPr>
           <a:xfrm>
             <a:off x="0" y="0"/>
-            <a:ext cx="164592" cy="960120"/>
+            <a:ext cx="109728" cy="868680"/>
           </a:xfrm>
           <a:prstGeom prst="rect">
             <a:avLst/>
           </a:prstGeom>
           <a:solidFill>
-            <a:srgbClr val="0D6E6E"/>
+            <a:srgbClr val="C45C26"/>
           </a:solidFill>
           <a:ln>
             <a:noFill/>
           </a:ln>
-          <a:effectLst/>
         </p:spPr>
         <p:style>
           <a:lnRef idx="1">
@@ -3718,8 +3413,8 @@
         </p:nvSpPr>
         <p:spPr>
           <a:xfrm>
-            <a:off x="457200" y="109728"/>
-            <a:ext cx="10972800" cy="256032"/>
+            <a:off x="411480" y="182880"/>
+            <a:ext cx="10972800" cy="548640"/>
           </a:xfrm>
           <a:prstGeom prst="rect">
             <a:avLst/>
@@ -3727,67 +3422,48 @@
           <a:noFill/>
         </p:spPr>
         <p:txBody>
-          <a:bodyPr wrap="square" anchor="t">
+          <a:bodyPr wrap="square">
             <a:spAutoFit/>
           </a:bodyPr>
           <a:lstStyle/>
           <a:p>
-            <a:pPr algn="l">
-              <a:spcAft>
-                <a:spcPts val="0"/>
-              </a:spcAft>
-            </a:pPr>
-            <a:r>
-              <a:rPr sz="1100" b="1" i="0">
-                <a:solidFill>
-                  <a:srgbClr val="C45C26"/>
-                </a:solidFill>
-                <a:latin typeface="Calibri"/>
-              </a:rPr>
-              <a:t>WIN-WIN</a:t>
-            </a:r>
-          </a:p>
-        </p:txBody>
-      </p:sp>
-      <p:sp>
-        <p:nvSpPr>
-          <p:cNvPr id="5" name="TextBox 4"/>
-          <p:cNvSpPr txBox="1"/>
-          <p:nvPr/>
-        </p:nvSpPr>
-        <p:spPr>
-          <a:xfrm>
-            <a:off x="457200" y="384048"/>
-            <a:ext cx="11247120" cy="475488"/>
-          </a:xfrm>
-          <a:prstGeom prst="rect">
-            <a:avLst/>
-          </a:prstGeom>
-          <a:noFill/>
-        </p:spPr>
-        <p:txBody>
-          <a:bodyPr wrap="square" anchor="t">
-            <a:spAutoFit/>
-          </a:bodyPr>
-          <a:lstStyle/>
-          <a:p>
-            <a:pPr algn="l">
-              <a:spcAft>
-                <a:spcPts val="0"/>
-              </a:spcAft>
-            </a:pPr>
-            <a:r>
-              <a:rPr sz="2200" b="1" i="0">
+            <a:pPr algn="l"/>
+            <a:r>
+              <a:rPr sz="2400" b="1" i="0">
                 <a:solidFill>
                   <a:srgbClr val="0A1F2E"/>
                 </a:solidFill>
                 <a:latin typeface="Calibri"/>
               </a:rPr>
-              <a:t>Mutual value for FairBanks and the programme</a:t>
-            </a:r>
-          </a:p>
-        </p:txBody>
-      </p:sp>
+              <a:t>Youth-led health in Uganda</a:t>
+            </a:r>
+          </a:p>
+        </p:txBody>
+      </p:sp>
+      <p:pic>
+        <p:nvPicPr>
+          <p:cNvPr id="5" name="Picture 4" descr="outreach_audience_full_group_01_opt.jpg"/>
+          <p:cNvPicPr>
+            <a:picLocks noChangeAspect="1"/>
+          </p:cNvPicPr>
+          <p:nvPr/>
+        </p:nvPicPr>
+        <p:blipFill>
+          <a:blip r:embed="rId2"/>
+          <a:stretch>
+            <a:fillRect/>
+          </a:stretch>
+        </p:blipFill>
+        <p:spPr>
+          <a:xfrm>
+            <a:off x="365760" y="1951330"/>
+            <a:ext cx="5120640" cy="3412540"/>
+          </a:xfrm>
+          <a:prstGeom prst="rect">
+            <a:avLst/>
+          </a:prstGeom>
+        </p:spPr>
+      </p:pic>
       <p:sp>
         <p:nvSpPr>
           <p:cNvPr id="6" name="TextBox 5"/>
@@ -3796,47 +3472,8 @@
         </p:nvSpPr>
         <p:spPr>
           <a:xfrm>
-            <a:off x="457200" y="1143000"/>
-            <a:ext cx="5486400" cy="320040"/>
-          </a:xfrm>
-          <a:prstGeom prst="rect">
-            <a:avLst/>
-          </a:prstGeom>
-          <a:noFill/>
-        </p:spPr>
-        <p:txBody>
-          <a:bodyPr wrap="square" anchor="t">
-            <a:spAutoFit/>
-          </a:bodyPr>
-          <a:lstStyle/>
-          <a:p>
-            <a:pPr algn="l">
-              <a:spcAft>
-                <a:spcPts val="0"/>
-              </a:spcAft>
-            </a:pPr>
-            <a:r>
-              <a:rPr sz="1600" b="1" i="0">
-                <a:solidFill>
-                  <a:srgbClr val="0D6E6E"/>
-                </a:solidFill>
-                <a:latin typeface="Calibri"/>
-              </a:rPr>
-              <a:t>What we gain</a:t>
-            </a:r>
-          </a:p>
-        </p:txBody>
-      </p:sp>
-      <p:sp>
-        <p:nvSpPr>
-          <p:cNvPr id="7" name="TextBox 6"/>
-          <p:cNvSpPr txBox="1"/>
-          <p:nvPr/>
-        </p:nvSpPr>
-        <p:spPr>
-          <a:xfrm>
-            <a:off x="457200" y="1508760"/>
-            <a:ext cx="5486400" cy="4800600"/>
+            <a:off x="5669280" y="1005840"/>
+            <a:ext cx="6126480" cy="5303520"/>
           </a:xfrm>
           <a:prstGeom prst="rect">
             <a:avLst/>
@@ -3849,207 +3486,29 @@
           </a:bodyPr>
           <a:lstStyle/>
           <a:p>
-            <a:pPr>
-              <a:spcAft>
-                <a:spcPts val="800"/>
-              </a:spcAft>
-            </a:pPr>
-            <a:r>
-              <a:rPr sz="1300">
+            <a:pPr algn="l"/>
+            <a:r>
+              <a:rPr sz="1500" b="0" i="0">
                 <a:solidFill>
                   <a:srgbClr val="1E2F38"/>
                 </a:solidFill>
                 <a:latin typeface="Calibri"/>
               </a:rPr>
-              <a:t>•  Access to three days of global health agenda-setting in Berlin</a:t>
-            </a:r>
-          </a:p>
-          <a:p>
-            <a:pPr>
-              <a:spcAft>
-                <a:spcPts val="800"/>
-              </a:spcAft>
-            </a:pPr>
-            <a:r>
-              <a:rPr sz="1300">
-                <a:solidFill>
-                  <a:srgbClr val="1E2F38"/>
-                </a:solidFill>
-                <a:latin typeface="Calibri"/>
-              </a:rPr>
-              <a:t>•  Networking with ministries, NGOs, and innovators</a:t>
-            </a:r>
-          </a:p>
-          <a:p>
-            <a:pPr>
-              <a:spcAft>
-                <a:spcPts val="800"/>
-              </a:spcAft>
-            </a:pPr>
-            <a:r>
-              <a:rPr sz="1300">
-                <a:solidFill>
-                  <a:srgbClr val="1E2F38"/>
-                </a:solidFill>
-                <a:latin typeface="Calibri"/>
-              </a:rPr>
-              <a:t>•  Visibility for FCHIP and FairBanks Community Reach</a:t>
-            </a:r>
-          </a:p>
-          <a:p>
-            <a:pPr>
-              <a:spcAft>
-                <a:spcPts val="800"/>
-              </a:spcAft>
-            </a:pPr>
-            <a:r>
-              <a:rPr sz="1300">
-                <a:solidFill>
-                  <a:srgbClr val="1E2F38"/>
-                </a:solidFill>
-                <a:latin typeface="Calibri"/>
-              </a:rPr>
-              <a:t>•  Learning that feeds Uganda programme design</a:t>
-            </a:r>
-          </a:p>
-        </p:txBody>
-      </p:sp>
-      <p:sp>
-        <p:nvSpPr>
-          <p:cNvPr id="8" name="TextBox 7"/>
-          <p:cNvSpPr txBox="1"/>
-          <p:nvPr/>
-        </p:nvSpPr>
-        <p:spPr>
-          <a:xfrm>
-            <a:off x="6309360" y="1143000"/>
-            <a:ext cx="5486400" cy="320040"/>
-          </a:xfrm>
-          <a:prstGeom prst="rect">
-            <a:avLst/>
-          </a:prstGeom>
-          <a:noFill/>
-        </p:spPr>
-        <p:txBody>
-          <a:bodyPr wrap="square" anchor="t">
-            <a:spAutoFit/>
-          </a:bodyPr>
-          <a:lstStyle/>
-          <a:p>
-            <a:pPr algn="l">
-              <a:spcAft>
-                <a:spcPts val="0"/>
-              </a:spcAft>
-            </a:pPr>
-            <a:r>
-              <a:rPr sz="1600" b="1" i="0">
-                <a:solidFill>
-                  <a:srgbClr val="0D6E6E"/>
-                </a:solidFill>
-                <a:latin typeface="Calibri"/>
-              </a:rPr>
-              <a:t>What they gain</a:t>
-            </a:r>
-          </a:p>
-        </p:txBody>
-      </p:sp>
-      <p:sp>
-        <p:nvSpPr>
-          <p:cNvPr id="9" name="TextBox 8"/>
-          <p:cNvSpPr txBox="1"/>
-          <p:nvPr/>
-        </p:nvSpPr>
-        <p:spPr>
-          <a:xfrm>
-            <a:off x="6309360" y="1508760"/>
-            <a:ext cx="5394960" cy="4800600"/>
-          </a:xfrm>
-          <a:prstGeom prst="rect">
-            <a:avLst/>
-          </a:prstGeom>
-          <a:noFill/>
-        </p:spPr>
-        <p:txBody>
-          <a:bodyPr wrap="square">
-            <a:spAutoFit/>
-          </a:bodyPr>
-          <a:lstStyle/>
-          <a:p>
-            <a:pPr>
-              <a:spcAft>
-                <a:spcPts val="800"/>
-              </a:spcAft>
-            </a:pPr>
-            <a:r>
-              <a:rPr sz="1300">
-                <a:solidFill>
-                  <a:srgbClr val="1E2F38"/>
-                </a:solidFill>
-                <a:latin typeface="Calibri"/>
-              </a:rPr>
-              <a:t>•  Youth delegates from an underrepresented region with real field work</a:t>
-            </a:r>
-          </a:p>
-          <a:p>
-            <a:pPr>
-              <a:spcAft>
-                <a:spcPts val="800"/>
-              </a:spcAft>
-            </a:pPr>
-            <a:r>
-              <a:rPr sz="1300">
-                <a:solidFill>
-                  <a:srgbClr val="1E2F38"/>
-                </a:solidFill>
-                <a:latin typeface="Calibri"/>
-              </a:rPr>
-              <a:t>•  Concrete community health intelligence narrative for summit sessions</a:t>
-            </a:r>
-          </a:p>
-          <a:p>
-            <a:pPr>
-              <a:spcAft>
-                <a:spcPts val="800"/>
-              </a:spcAft>
-            </a:pPr>
-            <a:r>
-              <a:rPr sz="1300">
-                <a:solidFill>
-                  <a:srgbClr val="1E2F38"/>
-                </a:solidFill>
-                <a:latin typeface="Calibri"/>
-              </a:rPr>
-              <a:t>•  Organisation that will share learnings back home, not only attend</a:t>
-            </a:r>
-          </a:p>
-          <a:p>
-            <a:pPr>
-              <a:spcAft>
-                <a:spcPts val="800"/>
-              </a:spcAft>
-            </a:pPr>
-            <a:r>
-              <a:rPr sz="1300">
-                <a:solidFill>
-                  <a:srgbClr val="1E2F38"/>
-                </a:solidFill>
-                <a:latin typeface="Calibri"/>
-              </a:rPr>
-              <a:t>•  Diverse group size (3–15) ready to engage seriously</a:t>
-            </a:r>
-          </a:p>
-        </p:txBody>
-      </p:sp>
-      <p:sp>
-        <p:nvSpPr>
-          <p:cNvPr id="10" name="Rectangle 9"/>
+              <a:t>FairBanks Community Reach is a youth-led community health initiative rooted in Kampala, Uganda. We work alongside Community Health Workers and Village Health Teams in neighbourhoods including Bukoto, Kyebando, Kisaasi, Kamwokya, and Kikaaya — running outreach, screening, maternal support, and health education where clinics alone cannot reach.</a:t>
+            </a:r>
+          </a:p>
+        </p:txBody>
+      </p:sp>
+      <p:sp>
+        <p:nvSpPr>
+          <p:cNvPr id="7" name="Rectangle 6"/>
           <p:cNvSpPr/>
           <p:nvPr/>
         </p:nvSpPr>
         <p:spPr>
           <a:xfrm>
-            <a:off x="0" y="6565392"/>
-            <a:ext cx="12191695" cy="292608"/>
+            <a:off x="0" y="6583680"/>
+            <a:ext cx="12191695" cy="274320"/>
           </a:xfrm>
           <a:prstGeom prst="rect">
             <a:avLst/>
@@ -4060,7 +3519,6 @@
           <a:ln>
             <a:noFill/>
           </a:ln>
-          <a:effectLst/>
         </p:spPr>
         <p:style>
           <a:lnRef idx="1">
@@ -4086,14 +3544,14 @@
       </p:sp>
       <p:sp>
         <p:nvSpPr>
-          <p:cNvPr id="11" name="TextBox 10"/>
+          <p:cNvPr id="8" name="TextBox 7"/>
           <p:cNvSpPr txBox="1"/>
           <p:nvPr/>
         </p:nvSpPr>
         <p:spPr>
           <a:xfrm>
-            <a:off x="365760" y="6574536"/>
-            <a:ext cx="9144000" cy="274320"/>
+            <a:off x="365760" y="6601968"/>
+            <a:ext cx="10058400" cy="228600"/>
           </a:xfrm>
           <a:prstGeom prst="rect">
             <a:avLst/>
@@ -4101,16 +3559,12 @@
           <a:noFill/>
         </p:spPr>
         <p:txBody>
-          <a:bodyPr wrap="square" anchor="ctr">
+          <a:bodyPr wrap="square">
             <a:spAutoFit/>
           </a:bodyPr>
           <a:lstStyle/>
           <a:p>
-            <a:pPr algn="l">
-              <a:spcAft>
-                <a:spcPts val="0"/>
-              </a:spcAft>
-            </a:pPr>
+            <a:pPr algn="l"/>
             <a:r>
               <a:rPr sz="900" b="0" i="0">
                 <a:solidFill>
@@ -4118,21 +3572,21 @@
                 </a:solidFill>
                 <a:latin typeface="Calibri"/>
               </a:rPr>
-              <a:t>FairBanks FCHIP  |  World Health Summit 2026 Youth Group Opp  |  Your health, our mission.</a:t>
-            </a:r>
-          </a:p>
-        </p:txBody>
-      </p:sp>
-      <p:sp>
-        <p:nvSpPr>
-          <p:cNvPr id="12" name="TextBox 11"/>
+              <a:t>FairBanks Youth Delegation  |  WHS 2026 Berlin  |  Your health, our mission.</a:t>
+            </a:r>
+          </a:p>
+        </p:txBody>
+      </p:sp>
+      <p:sp>
+        <p:nvSpPr>
+          <p:cNvPr id="9" name="TextBox 8"/>
           <p:cNvSpPr txBox="1"/>
           <p:nvPr/>
         </p:nvSpPr>
         <p:spPr>
           <a:xfrm>
-            <a:off x="11094415" y="6574536"/>
-            <a:ext cx="731520" cy="274320"/>
+            <a:off x="11368735" y="6601968"/>
+            <a:ext cx="548640" cy="228600"/>
           </a:xfrm>
           <a:prstGeom prst="rect">
             <a:avLst/>
@@ -4140,16 +3594,12 @@
           <a:noFill/>
         </p:spPr>
         <p:txBody>
-          <a:bodyPr wrap="square" anchor="ctr">
+          <a:bodyPr wrap="square">
             <a:spAutoFit/>
           </a:bodyPr>
           <a:lstStyle/>
           <a:p>
-            <a:pPr algn="r">
-              <a:spcAft>
-                <a:spcPts val="0"/>
-              </a:spcAft>
-            </a:pPr>
+            <a:pPr algn="r"/>
             <a:r>
               <a:rPr sz="900" b="0" i="0">
                 <a:solidFill>
@@ -4189,7 +3639,7 @@
         <p:spPr>
           <a:xfrm>
             <a:off x="0" y="0"/>
-            <a:ext cx="12191695" cy="960120"/>
+            <a:ext cx="12191695" cy="868680"/>
           </a:xfrm>
           <a:prstGeom prst="rect">
             <a:avLst/>
@@ -4200,7 +3650,6 @@
           <a:ln>
             <a:noFill/>
           </a:ln>
-          <a:effectLst/>
         </p:spPr>
         <p:style>
           <a:lnRef idx="1">
@@ -4233,18 +3682,17 @@
         <p:spPr>
           <a:xfrm>
             <a:off x="0" y="0"/>
-            <a:ext cx="164592" cy="960120"/>
+            <a:ext cx="109728" cy="868680"/>
           </a:xfrm>
           <a:prstGeom prst="rect">
             <a:avLst/>
           </a:prstGeom>
           <a:solidFill>
-            <a:srgbClr val="0D6E6E"/>
+            <a:srgbClr val="C45C26"/>
           </a:solidFill>
           <a:ln>
             <a:noFill/>
           </a:ln>
-          <a:effectLst/>
         </p:spPr>
         <p:style>
           <a:lnRef idx="1">
@@ -4276,8 +3724,8 @@
         </p:nvSpPr>
         <p:spPr>
           <a:xfrm>
-            <a:off x="457200" y="109728"/>
-            <a:ext cx="10972800" cy="256032"/>
+            <a:off x="411480" y="182880"/>
+            <a:ext cx="10972800" cy="548640"/>
           </a:xfrm>
           <a:prstGeom prst="rect">
             <a:avLst/>
@@ -4285,70 +3733,27 @@
           <a:noFill/>
         </p:spPr>
         <p:txBody>
-          <a:bodyPr wrap="square" anchor="t">
+          <a:bodyPr wrap="square">
             <a:spAutoFit/>
           </a:bodyPr>
           <a:lstStyle/>
           <a:p>
-            <a:pPr algn="l">
-              <a:spcAft>
-                <a:spcPts val="0"/>
-              </a:spcAft>
-            </a:pPr>
-            <a:r>
-              <a:rPr sz="1100" b="1" i="0">
-                <a:solidFill>
-                  <a:srgbClr val="C45C26"/>
-                </a:solidFill>
-                <a:latin typeface="Calibri"/>
-              </a:rPr>
-              <a:t>THE PROBLEM</a:t>
-            </a:r>
-          </a:p>
-        </p:txBody>
-      </p:sp>
-      <p:sp>
-        <p:nvSpPr>
-          <p:cNvPr id="5" name="TextBox 4"/>
-          <p:cNvSpPr txBox="1"/>
-          <p:nvPr/>
-        </p:nvSpPr>
-        <p:spPr>
-          <a:xfrm>
-            <a:off x="457200" y="384048"/>
-            <a:ext cx="11247120" cy="475488"/>
-          </a:xfrm>
-          <a:prstGeom prst="rect">
-            <a:avLst/>
-          </a:prstGeom>
-          <a:noFill/>
-        </p:spPr>
-        <p:txBody>
-          <a:bodyPr wrap="square" anchor="t">
-            <a:spAutoFit/>
-          </a:bodyPr>
-          <a:lstStyle/>
-          <a:p>
-            <a:pPr algn="l">
-              <a:spcAft>
-                <a:spcPts val="0"/>
-              </a:spcAft>
-            </a:pPr>
-            <a:r>
-              <a:rPr sz="2200" b="1" i="0">
+            <a:pPr algn="l"/>
+            <a:r>
+              <a:rPr sz="2400" b="1" i="0">
                 <a:solidFill>
                   <a:srgbClr val="0A1F2E"/>
                 </a:solidFill>
                 <a:latin typeface="Calibri"/>
               </a:rPr>
-              <a:t>Health systems react too late</a:t>
+              <a:t>Why Berlin</a:t>
             </a:r>
           </a:p>
         </p:txBody>
       </p:sp>
       <p:pic>
         <p:nvPicPr>
-          <p:cNvPr id="6" name="Picture 5" descr="reactive_clinic_opt.jpg"/>
+          <p:cNvPr id="5" name="Picture 4" descr="bloom_maternal_health_participant_01_opt.jpg"/>
           <p:cNvPicPr>
             <a:picLocks noChangeAspect="1"/>
           </p:cNvPicPr>
@@ -4362,8 +3767,8 @@
         </p:blipFill>
         <p:spPr>
           <a:xfrm>
-            <a:off x="411480" y="2004691"/>
-            <a:ext cx="5303520" cy="3534417"/>
+            <a:off x="365760" y="1950720"/>
+            <a:ext cx="5120640" cy="3413760"/>
           </a:xfrm>
           <a:prstGeom prst="rect">
             <a:avLst/>
@@ -4372,14 +3777,14 @@
       </p:pic>
       <p:sp>
         <p:nvSpPr>
-          <p:cNvPr id="7" name="TextBox 6"/>
+          <p:cNvPr id="6" name="TextBox 5"/>
           <p:cNvSpPr txBox="1"/>
           <p:nvPr/>
         </p:nvSpPr>
         <p:spPr>
           <a:xfrm>
-            <a:off x="6035040" y="1234440"/>
-            <a:ext cx="5669280" cy="5074920"/>
+            <a:off x="5669280" y="1005840"/>
+            <a:ext cx="6126480" cy="5303520"/>
           </a:xfrm>
           <a:prstGeom prst="rect">
             <a:avLst/>
@@ -4392,97 +3797,29 @@
           </a:bodyPr>
           <a:lstStyle/>
           <a:p>
-            <a:pPr>
-              <a:spcAft>
-                <a:spcPts val="800"/>
-              </a:spcAft>
-            </a:pPr>
-            <a:r>
-              <a:rPr sz="1400">
+            <a:pPr algn="l"/>
+            <a:r>
+              <a:rPr sz="1500" b="0" i="0">
                 <a:solidFill>
                   <a:srgbClr val="1E2F38"/>
                 </a:solidFill>
                 <a:latin typeface="Calibri"/>
               </a:rPr>
-              <a:t>•  Care often starts only after people fall sick</a:t>
-            </a:r>
-          </a:p>
-          <a:p>
-            <a:pPr>
-              <a:spcAft>
-                <a:spcPts val="800"/>
-              </a:spcAft>
-            </a:pPr>
-            <a:r>
-              <a:rPr sz="1400">
-                <a:solidFill>
-                  <a:srgbClr val="1E2F38"/>
-                </a:solidFill>
-                <a:latin typeface="Calibri"/>
-              </a:rPr>
-              <a:t>•  Community health data sits in paper registers and silos</a:t>
-            </a:r>
-          </a:p>
-          <a:p>
-            <a:pPr>
-              <a:spcAft>
-                <a:spcPts val="800"/>
-              </a:spcAft>
-            </a:pPr>
-            <a:r>
-              <a:rPr sz="1400">
-                <a:solidFill>
-                  <a:srgbClr val="1E2F38"/>
-                </a:solidFill>
-                <a:latin typeface="Calibri"/>
-              </a:rPr>
-              <a:t>•  High-risk pregnancies and NCDs are found too late</a:t>
-            </a:r>
-          </a:p>
-          <a:p>
-            <a:pPr>
-              <a:spcAft>
-                <a:spcPts val="800"/>
-              </a:spcAft>
-            </a:pPr>
-            <a:r>
-              <a:rPr sz="1400">
-                <a:solidFill>
-                  <a:srgbClr val="1E2F38"/>
-                </a:solidFill>
-                <a:latin typeface="Calibri"/>
-              </a:rPr>
-              <a:t>•  Medicine stock-outs hit hard during disease surges</a:t>
-            </a:r>
-          </a:p>
-          <a:p>
-            <a:pPr>
-              <a:spcAft>
-                <a:spcPts val="800"/>
-              </a:spcAft>
-            </a:pPr>
-            <a:r>
-              <a:rPr sz="1400">
-                <a:solidFill>
-                  <a:srgbClr val="1E2F38"/>
-                </a:solidFill>
-                <a:latin typeface="Calibri"/>
-              </a:rPr>
-              <a:t>•  Health shocks push poor families deeper into hardship</a:t>
-            </a:r>
-          </a:p>
-        </p:txBody>
-      </p:sp>
-      <p:sp>
-        <p:nvSpPr>
-          <p:cNvPr id="8" name="Rectangle 7"/>
+              <a:t>Learn how leading health systems, researchers, and youth networks approach prevention, digital health governance, and pandemic preparedness — then translate lessons for our CHWs.</a:t>
+            </a:r>
+          </a:p>
+        </p:txBody>
+      </p:sp>
+      <p:sp>
+        <p:nvSpPr>
+          <p:cNvPr id="7" name="Rectangle 6"/>
           <p:cNvSpPr/>
           <p:nvPr/>
         </p:nvSpPr>
         <p:spPr>
           <a:xfrm>
-            <a:off x="0" y="6565392"/>
-            <a:ext cx="12191695" cy="292608"/>
+            <a:off x="0" y="6583680"/>
+            <a:ext cx="12191695" cy="274320"/>
           </a:xfrm>
           <a:prstGeom prst="rect">
             <a:avLst/>
@@ -4493,7 +3830,6 @@
           <a:ln>
             <a:noFill/>
           </a:ln>
-          <a:effectLst/>
         </p:spPr>
         <p:style>
           <a:lnRef idx="1">
@@ -4519,14 +3855,14 @@
       </p:sp>
       <p:sp>
         <p:nvSpPr>
-          <p:cNvPr id="9" name="TextBox 8"/>
+          <p:cNvPr id="8" name="TextBox 7"/>
           <p:cNvSpPr txBox="1"/>
           <p:nvPr/>
         </p:nvSpPr>
         <p:spPr>
           <a:xfrm>
-            <a:off x="365760" y="6574536"/>
-            <a:ext cx="9144000" cy="274320"/>
+            <a:off x="365760" y="6601968"/>
+            <a:ext cx="10058400" cy="228600"/>
           </a:xfrm>
           <a:prstGeom prst="rect">
             <a:avLst/>
@@ -4534,16 +3870,12 @@
           <a:noFill/>
         </p:spPr>
         <p:txBody>
-          <a:bodyPr wrap="square" anchor="ctr">
+          <a:bodyPr wrap="square">
             <a:spAutoFit/>
           </a:bodyPr>
           <a:lstStyle/>
           <a:p>
-            <a:pPr algn="l">
-              <a:spcAft>
-                <a:spcPts val="0"/>
-              </a:spcAft>
-            </a:pPr>
+            <a:pPr algn="l"/>
             <a:r>
               <a:rPr sz="900" b="0" i="0">
                 <a:solidFill>
@@ -4551,21 +3883,21 @@
                 </a:solidFill>
                 <a:latin typeface="Calibri"/>
               </a:rPr>
-              <a:t>FairBanks FCHIP  |  World Health Summit 2026 Youth Group Opp  |  Your health, our mission.</a:t>
-            </a:r>
-          </a:p>
-        </p:txBody>
-      </p:sp>
-      <p:sp>
-        <p:nvSpPr>
-          <p:cNvPr id="10" name="TextBox 9"/>
+              <a:t>FairBanks Youth Delegation  |  WHS 2026 Berlin  |  Your health, our mission.</a:t>
+            </a:r>
+          </a:p>
+        </p:txBody>
+      </p:sp>
+      <p:sp>
+        <p:nvSpPr>
+          <p:cNvPr id="9" name="TextBox 8"/>
           <p:cNvSpPr txBox="1"/>
           <p:nvPr/>
         </p:nvSpPr>
         <p:spPr>
           <a:xfrm>
-            <a:off x="11094415" y="6574536"/>
-            <a:ext cx="731520" cy="274320"/>
+            <a:off x="11368735" y="6601968"/>
+            <a:ext cx="548640" cy="228600"/>
           </a:xfrm>
           <a:prstGeom prst="rect">
             <a:avLst/>
@@ -4573,16 +3905,12 @@
           <a:noFill/>
         </p:spPr>
         <p:txBody>
-          <a:bodyPr wrap="square" anchor="ctr">
+          <a:bodyPr wrap="square">
             <a:spAutoFit/>
           </a:bodyPr>
           <a:lstStyle/>
           <a:p>
-            <a:pPr algn="r">
-              <a:spcAft>
-                <a:spcPts val="0"/>
-              </a:spcAft>
-            </a:pPr>
+            <a:pPr algn="r"/>
             <a:r>
               <a:rPr sz="900" b="0" i="0">
                 <a:solidFill>
@@ -4622,7 +3950,7 @@
         <p:spPr>
           <a:xfrm>
             <a:off x="0" y="0"/>
-            <a:ext cx="12191695" cy="960120"/>
+            <a:ext cx="12191695" cy="868680"/>
           </a:xfrm>
           <a:prstGeom prst="rect">
             <a:avLst/>
@@ -4633,7 +3961,6 @@
           <a:ln>
             <a:noFill/>
           </a:ln>
-          <a:effectLst/>
         </p:spPr>
         <p:style>
           <a:lnRef idx="1">
@@ -4666,18 +3993,17 @@
         <p:spPr>
           <a:xfrm>
             <a:off x="0" y="0"/>
-            <a:ext cx="164592" cy="960120"/>
+            <a:ext cx="109728" cy="868680"/>
           </a:xfrm>
           <a:prstGeom prst="rect">
             <a:avLst/>
           </a:prstGeom>
           <a:solidFill>
-            <a:srgbClr val="0D6E6E"/>
+            <a:srgbClr val="C45C26"/>
           </a:solidFill>
           <a:ln>
             <a:noFill/>
           </a:ln>
-          <a:effectLst/>
         </p:spPr>
         <p:style>
           <a:lnRef idx="1">
@@ -4709,8 +4035,8 @@
         </p:nvSpPr>
         <p:spPr>
           <a:xfrm>
-            <a:off x="457200" y="109728"/>
-            <a:ext cx="10972800" cy="256032"/>
+            <a:off x="411480" y="182880"/>
+            <a:ext cx="10972800" cy="548640"/>
           </a:xfrm>
           <a:prstGeom prst="rect">
             <a:avLst/>
@@ -4718,70 +4044,27 @@
           <a:noFill/>
         </p:spPr>
         <p:txBody>
-          <a:bodyPr wrap="square" anchor="t">
+          <a:bodyPr wrap="square">
             <a:spAutoFit/>
           </a:bodyPr>
           <a:lstStyle/>
           <a:p>
-            <a:pPr algn="l">
-              <a:spcAft>
-                <a:spcPts val="0"/>
-              </a:spcAft>
-            </a:pPr>
-            <a:r>
-              <a:rPr sz="1100" b="1" i="0">
-                <a:solidFill>
-                  <a:srgbClr val="C45C26"/>
-                </a:solidFill>
-                <a:latin typeface="Calibri"/>
-              </a:rPr>
-              <a:t>THE SOLUTION</a:t>
-            </a:r>
-          </a:p>
-        </p:txBody>
-      </p:sp>
-      <p:sp>
-        <p:nvSpPr>
-          <p:cNvPr id="5" name="TextBox 4"/>
-          <p:cNvSpPr txBox="1"/>
-          <p:nvPr/>
-        </p:nvSpPr>
-        <p:spPr>
-          <a:xfrm>
-            <a:off x="457200" y="384048"/>
-            <a:ext cx="11247120" cy="475488"/>
-          </a:xfrm>
-          <a:prstGeom prst="rect">
-            <a:avLst/>
-          </a:prstGeom>
-          <a:noFill/>
-        </p:spPr>
-        <p:txBody>
-          <a:bodyPr wrap="square" anchor="t">
-            <a:spAutoFit/>
-          </a:bodyPr>
-          <a:lstStyle/>
-          <a:p>
-            <a:pPr algn="l">
-              <a:spcAft>
-                <a:spcPts val="0"/>
-              </a:spcAft>
-            </a:pPr>
-            <a:r>
-              <a:rPr sz="2200" b="1" i="0">
+            <a:pPr algn="l"/>
+            <a:r>
+              <a:rPr sz="2400" b="1" i="0">
                 <a:solidFill>
                   <a:srgbClr val="0A1F2E"/>
                 </a:solidFill>
                 <a:latin typeface="Calibri"/>
               </a:rPr>
-              <a:t>FCHIP — community health intelligence</a:t>
+              <a:t>Learning agenda</a:t>
             </a:r>
           </a:p>
         </p:txBody>
       </p:sp>
       <p:pic>
         <p:nvPicPr>
-          <p:cNvPr id="6" name="Picture 5" descr="data_flow_iso_labeled_opt.jpg"/>
+          <p:cNvPr id="5" name="Picture 4" descr="indoor_training_audience_01_opt.jpg"/>
           <p:cNvPicPr>
             <a:picLocks noChangeAspect="1"/>
           </p:cNvPicPr>
@@ -4795,8 +4078,8 @@
         </p:blipFill>
         <p:spPr>
           <a:xfrm>
-            <a:off x="365760" y="1639062"/>
-            <a:ext cx="6400800" cy="4265676"/>
+            <a:off x="365760" y="1950720"/>
+            <a:ext cx="5120640" cy="3413760"/>
           </a:xfrm>
           <a:prstGeom prst="rect">
             <a:avLst/>
@@ -4805,14 +4088,14 @@
       </p:pic>
       <p:sp>
         <p:nvSpPr>
-          <p:cNvPr id="7" name="TextBox 6"/>
+          <p:cNvPr id="6" name="TextBox 5"/>
           <p:cNvSpPr txBox="1"/>
           <p:nvPr/>
         </p:nvSpPr>
         <p:spPr>
           <a:xfrm>
-            <a:off x="7040880" y="1234440"/>
-            <a:ext cx="4754880" cy="5074920"/>
+            <a:off x="5669280" y="1005840"/>
+            <a:ext cx="6126480" cy="5303520"/>
           </a:xfrm>
           <a:prstGeom prst="rect">
             <a:avLst/>
@@ -4825,81 +4108,65 @@
           </a:bodyPr>
           <a:lstStyle/>
           <a:p>
-            <a:pPr>
-              <a:spcAft>
-                <a:spcPts val="800"/>
-              </a:spcAft>
-            </a:pPr>
-            <a:r>
-              <a:rPr sz="1400">
+            <a:pPr algn="l"/>
+            <a:r>
+              <a:rPr sz="1500" b="0" i="0">
                 <a:solidFill>
                   <a:srgbClr val="1E2F38"/>
                 </a:solidFill>
                 <a:latin typeface="Calibri"/>
               </a:rPr>
-              <a:t>•  CHWs and VHTs capture structured data at household level</a:t>
-            </a:r>
-          </a:p>
-          <a:p>
-            <a:pPr>
-              <a:spcAft>
-                <a:spcPts val="800"/>
-              </a:spcAft>
-            </a:pPr>
-            <a:r>
-              <a:rPr sz="1400">
+              <a:t>• Prevention &amp; primary care</a:t>
+            </a:r>
+          </a:p>
+          <a:p>
+            <a:pPr algn="l"/>
+            <a:r>
+              <a:rPr sz="1500" b="0" i="0">
                 <a:solidFill>
                   <a:srgbClr val="1E2F38"/>
                 </a:solidFill>
                 <a:latin typeface="Calibri"/>
               </a:rPr>
-              <a:t>•  FCHIP applies AI, ML, and GIS to predict risk early</a:t>
-            </a:r>
-          </a:p>
-          <a:p>
-            <a:pPr>
-              <a:spcAft>
-                <a:spcPts val="800"/>
-              </a:spcAft>
-            </a:pPr>
-            <a:r>
-              <a:rPr sz="1400">
+              <a:t>• Digital health &amp; ethics</a:t>
+            </a:r>
+          </a:p>
+          <a:p>
+            <a:pPr algn="l"/>
+            <a:r>
+              <a:rPr sz="1500" b="0" i="0">
                 <a:solidFill>
                   <a:srgbClr val="1E2F38"/>
                 </a:solidFill>
                 <a:latin typeface="Calibri"/>
               </a:rPr>
-              <a:t>•  Alerts reach clinics, districts, and partners in time to act</a:t>
-            </a:r>
-          </a:p>
-          <a:p>
-            <a:pPr>
-              <a:spcAft>
-                <a:spcPts val="800"/>
-              </a:spcAft>
-            </a:pPr>
-            <a:r>
-              <a:rPr sz="1400">
+              <a:t>• Youth leadership in health</a:t>
+            </a:r>
+          </a:p>
+          <a:p>
+            <a:pPr algn="l"/>
+            <a:r>
+              <a:rPr sz="1500" b="0" i="0">
                 <a:solidFill>
                   <a:srgbClr val="1E2F38"/>
                 </a:solidFill>
                 <a:latin typeface="Calibri"/>
               </a:rPr>
-              <a:t>•  Built on a live medical centre and community programmes</a:t>
-            </a:r>
-          </a:p>
-        </p:txBody>
-      </p:sp>
-      <p:sp>
-        <p:nvSpPr>
-          <p:cNvPr id="8" name="Rectangle 7"/>
+              <a:t>• Maternal &amp; child health</a:t>
+            </a:r>
+          </a:p>
+        </p:txBody>
+      </p:sp>
+      <p:sp>
+        <p:nvSpPr>
+          <p:cNvPr id="7" name="Rectangle 6"/>
           <p:cNvSpPr/>
           <p:nvPr/>
         </p:nvSpPr>
         <p:spPr>
           <a:xfrm>
-            <a:off x="0" y="6565392"/>
-            <a:ext cx="12191695" cy="292608"/>
+            <a:off x="0" y="6583680"/>
+            <a:ext cx="12191695" cy="274320"/>
           </a:xfrm>
           <a:prstGeom prst="rect">
             <a:avLst/>
@@ -4910,7 +4177,6 @@
           <a:ln>
             <a:noFill/>
           </a:ln>
-          <a:effectLst/>
         </p:spPr>
         <p:style>
           <a:lnRef idx="1">
@@ -4936,14 +4202,14 @@
       </p:sp>
       <p:sp>
         <p:nvSpPr>
-          <p:cNvPr id="9" name="TextBox 8"/>
+          <p:cNvPr id="8" name="TextBox 7"/>
           <p:cNvSpPr txBox="1"/>
           <p:nvPr/>
         </p:nvSpPr>
         <p:spPr>
           <a:xfrm>
-            <a:off x="365760" y="6574536"/>
-            <a:ext cx="9144000" cy="274320"/>
+            <a:off x="365760" y="6601968"/>
+            <a:ext cx="10058400" cy="228600"/>
           </a:xfrm>
           <a:prstGeom prst="rect">
             <a:avLst/>
@@ -4951,16 +4217,12 @@
           <a:noFill/>
         </p:spPr>
         <p:txBody>
-          <a:bodyPr wrap="square" anchor="ctr">
+          <a:bodyPr wrap="square">
             <a:spAutoFit/>
           </a:bodyPr>
           <a:lstStyle/>
           <a:p>
-            <a:pPr algn="l">
-              <a:spcAft>
-                <a:spcPts val="0"/>
-              </a:spcAft>
-            </a:pPr>
+            <a:pPr algn="l"/>
             <a:r>
               <a:rPr sz="900" b="0" i="0">
                 <a:solidFill>
@@ -4968,21 +4230,21 @@
                 </a:solidFill>
                 <a:latin typeface="Calibri"/>
               </a:rPr>
-              <a:t>FairBanks FCHIP  |  World Health Summit 2026 Youth Group Opp  |  Your health, our mission.</a:t>
-            </a:r>
-          </a:p>
-        </p:txBody>
-      </p:sp>
-      <p:sp>
-        <p:nvSpPr>
-          <p:cNvPr id="10" name="TextBox 9"/>
+              <a:t>FairBanks Youth Delegation  |  WHS 2026 Berlin  |  Your health, our mission.</a:t>
+            </a:r>
+          </a:p>
+        </p:txBody>
+      </p:sp>
+      <p:sp>
+        <p:nvSpPr>
+          <p:cNvPr id="9" name="TextBox 8"/>
           <p:cNvSpPr txBox="1"/>
           <p:nvPr/>
         </p:nvSpPr>
         <p:spPr>
           <a:xfrm>
-            <a:off x="11094415" y="6574536"/>
-            <a:ext cx="731520" cy="274320"/>
+            <a:off x="11368735" y="6601968"/>
+            <a:ext cx="548640" cy="228600"/>
           </a:xfrm>
           <a:prstGeom prst="rect">
             <a:avLst/>
@@ -4990,16 +4252,12 @@
           <a:noFill/>
         </p:spPr>
         <p:txBody>
-          <a:bodyPr wrap="square" anchor="ctr">
+          <a:bodyPr wrap="square">
             <a:spAutoFit/>
           </a:bodyPr>
           <a:lstStyle/>
           <a:p>
-            <a:pPr algn="r">
-              <a:spcAft>
-                <a:spcPts val="0"/>
-              </a:spcAft>
-            </a:pPr>
+            <a:pPr algn="r"/>
             <a:r>
               <a:rPr sz="900" b="0" i="0">
                 <a:solidFill>
@@ -5039,7 +4297,7 @@
         <p:spPr>
           <a:xfrm>
             <a:off x="0" y="0"/>
-            <a:ext cx="12191695" cy="960120"/>
+            <a:ext cx="12191695" cy="868680"/>
           </a:xfrm>
           <a:prstGeom prst="rect">
             <a:avLst/>
@@ -5050,7 +4308,6 @@
           <a:ln>
             <a:noFill/>
           </a:ln>
-          <a:effectLst/>
         </p:spPr>
         <p:style>
           <a:lnRef idx="1">
@@ -5083,18 +4340,17 @@
         <p:spPr>
           <a:xfrm>
             <a:off x="0" y="0"/>
-            <a:ext cx="164592" cy="960120"/>
+            <a:ext cx="109728" cy="868680"/>
           </a:xfrm>
           <a:prstGeom prst="rect">
             <a:avLst/>
           </a:prstGeom>
           <a:solidFill>
-            <a:srgbClr val="0D6E6E"/>
+            <a:srgbClr val="C45C26"/>
           </a:solidFill>
           <a:ln>
             <a:noFill/>
           </a:ln>
-          <a:effectLst/>
         </p:spPr>
         <p:style>
           <a:lnRef idx="1">
@@ -5126,8 +4382,8 @@
         </p:nvSpPr>
         <p:spPr>
           <a:xfrm>
-            <a:off x="457200" y="109728"/>
-            <a:ext cx="10972800" cy="256032"/>
+            <a:off x="411480" y="182880"/>
+            <a:ext cx="10972800" cy="548640"/>
           </a:xfrm>
           <a:prstGeom prst="rect">
             <a:avLst/>
@@ -5135,123 +4391,58 @@
           <a:noFill/>
         </p:spPr>
         <p:txBody>
-          <a:bodyPr wrap="square" anchor="t">
+          <a:bodyPr wrap="square">
             <a:spAutoFit/>
           </a:bodyPr>
           <a:lstStyle/>
           <a:p>
-            <a:pPr algn="l">
-              <a:spcAft>
-                <a:spcPts val="0"/>
-              </a:spcAft>
-            </a:pPr>
-            <a:r>
-              <a:rPr sz="1100" b="1" i="0">
-                <a:solidFill>
-                  <a:srgbClr val="C45C26"/>
-                </a:solidFill>
-                <a:latin typeface="Calibri"/>
-              </a:rPr>
-              <a:t>PROGRAMME FIT</a:t>
-            </a:r>
-          </a:p>
-        </p:txBody>
-      </p:sp>
-      <p:sp>
-        <p:nvSpPr>
-          <p:cNvPr id="5" name="TextBox 4"/>
-          <p:cNvSpPr txBox="1"/>
-          <p:nvPr/>
-        </p:nvSpPr>
-        <p:spPr>
-          <a:xfrm>
-            <a:off x="457200" y="384048"/>
-            <a:ext cx="11247120" cy="475488"/>
-          </a:xfrm>
-          <a:prstGeom prst="rect">
-            <a:avLst/>
-          </a:prstGeom>
-          <a:noFill/>
-        </p:spPr>
-        <p:txBody>
-          <a:bodyPr wrap="square" anchor="t">
-            <a:spAutoFit/>
-          </a:bodyPr>
-          <a:lstStyle/>
-          <a:p>
-            <a:pPr algn="l">
-              <a:spcAft>
-                <a:spcPts val="0"/>
-              </a:spcAft>
-            </a:pPr>
-            <a:r>
-              <a:rPr sz="2200" b="1" i="0">
+            <a:pPr algn="l"/>
+            <a:r>
+              <a:rPr sz="2400" b="1" i="0">
                 <a:solidFill>
                   <a:srgbClr val="0A1F2E"/>
                 </a:solidFill>
                 <a:latin typeface="Calibri"/>
               </a:rPr>
-              <a:t>Why this call matches FCHIP</a:t>
-            </a:r>
-          </a:p>
-        </p:txBody>
-      </p:sp>
-      <p:sp>
-        <p:nvSpPr>
-          <p:cNvPr id="6" name="Rectangle 5"/>
-          <p:cNvSpPr/>
+              <a:t>We bring lived practice</a:t>
+            </a:r>
+          </a:p>
+        </p:txBody>
+      </p:sp>
+      <p:pic>
+        <p:nvPicPr>
+          <p:cNvPr id="5" name="Picture 4" descr="outreach_mobile_phone_demo_01_opt.jpg"/>
+          <p:cNvPicPr>
+            <a:picLocks noChangeAspect="1"/>
+          </p:cNvPicPr>
           <p:nvPr/>
-        </p:nvSpPr>
-        <p:spPr>
-          <a:xfrm>
-            <a:off x="411480" y="1188720"/>
-            <a:ext cx="11338560" cy="1223010"/>
-          </a:xfrm>
-          <a:prstGeom prst="rect">
-            <a:avLst/>
-          </a:prstGeom>
-          <a:solidFill>
-            <a:srgbClr val="FFFFFF"/>
-          </a:solidFill>
-          <a:ln w="9525">
-            <a:solidFill>
-              <a:srgbClr val="D0DCDC"/>
-            </a:solidFill>
-          </a:ln>
-          <a:effectLst/>
-        </p:spPr>
-        <p:style>
-          <a:lnRef idx="1">
-            <a:schemeClr val="accent1"/>
-          </a:lnRef>
-          <a:fillRef idx="3">
-            <a:schemeClr val="accent1"/>
-          </a:fillRef>
-          <a:effectRef idx="2">
-            <a:schemeClr val="accent1"/>
-          </a:effectRef>
-          <a:fontRef idx="minor">
-            <a:schemeClr val="lt1"/>
-          </a:fontRef>
-        </p:style>
-        <p:txBody>
-          <a:bodyPr rtlCol="0" anchor="ctr"/>
-          <a:lstStyle/>
-          <a:p>
-            <a:pPr algn="ctr"/>
-          </a:p>
-        </p:txBody>
-      </p:sp>
-      <p:sp>
-        <p:nvSpPr>
-          <p:cNvPr id="7" name="TextBox 6"/>
+        </p:nvPicPr>
+        <p:blipFill>
+          <a:blip r:embed="rId2"/>
+          <a:stretch>
+            <a:fillRect/>
+          </a:stretch>
+        </p:blipFill>
+        <p:spPr>
+          <a:xfrm>
+            <a:off x="365760" y="1950720"/>
+            <a:ext cx="5120640" cy="3413760"/>
+          </a:xfrm>
+          <a:prstGeom prst="rect">
+            <a:avLst/>
+          </a:prstGeom>
+        </p:spPr>
+      </p:pic>
+      <p:sp>
+        <p:nvSpPr>
+          <p:cNvPr id="6" name="TextBox 5"/>
           <p:cNvSpPr txBox="1"/>
           <p:nvPr/>
         </p:nvSpPr>
         <p:spPr>
           <a:xfrm>
-            <a:off x="594360" y="1252728"/>
-            <a:ext cx="2926080" cy="1085850"/>
+            <a:off x="5669280" y="1005840"/>
+            <a:ext cx="6126480" cy="5303520"/>
           </a:xfrm>
           <a:prstGeom prst="rect">
             <a:avLst/>
@@ -5259,449 +4450,34 @@
           <a:noFill/>
         </p:spPr>
         <p:txBody>
-          <a:bodyPr wrap="square" anchor="ctr">
+          <a:bodyPr wrap="square">
             <a:spAutoFit/>
           </a:bodyPr>
           <a:lstStyle/>
           <a:p>
-            <a:pPr algn="l">
-              <a:spcAft>
-                <a:spcPts val="0"/>
-              </a:spcAft>
-            </a:pPr>
-            <a:r>
-              <a:rPr sz="1300" b="1" i="0">
+            <a:pPr algn="l"/>
+            <a:r>
+              <a:rPr sz="1500" b="0" i="0">
                 <a:solidFill>
-                  <a:srgbClr val="0D6E6E"/>
+                  <a:srgbClr val="1E2F38"/>
                 </a:solidFill>
                 <a:latin typeface="Calibri"/>
               </a:rPr>
-              <a:t>Youth-led health / impact org</a:t>
-            </a:r>
-          </a:p>
-        </p:txBody>
-      </p:sp>
-      <p:sp>
-        <p:nvSpPr>
-          <p:cNvPr id="8" name="TextBox 7"/>
-          <p:cNvSpPr txBox="1"/>
-          <p:nvPr/>
-        </p:nvSpPr>
-        <p:spPr>
-          <a:xfrm>
-            <a:off x="3657600" y="1252728"/>
-            <a:ext cx="7772400" cy="1085850"/>
-          </a:xfrm>
-          <a:prstGeom prst="rect">
-            <a:avLst/>
-          </a:prstGeom>
-          <a:noFill/>
-        </p:spPr>
-        <p:txBody>
-          <a:bodyPr wrap="square" anchor="ctr">
-            <a:spAutoFit/>
-          </a:bodyPr>
-          <a:lstStyle/>
-          <a:p>
-            <a:pPr algn="l">
-              <a:spcAft>
-                <a:spcPts val="0"/>
-              </a:spcAft>
-            </a:pPr>
-            <a:r>
-              <a:rPr sz="1200" b="0" i="0">
-                <a:solidFill>
-                  <a:srgbClr val="3A4A54"/>
-                </a:solidFill>
-                <a:latin typeface="Calibri"/>
-              </a:rPr>
-              <a:t>FairBanks youth cohort within community health ecosystem</a:t>
-            </a:r>
-          </a:p>
-        </p:txBody>
-      </p:sp>
-      <p:sp>
-        <p:nvSpPr>
-          <p:cNvPr id="9" name="Rectangle 8"/>
+              <a:t>Stories from real outreach — what works and what fails in last-mile Uganda</a:t>
+            </a:r>
+          </a:p>
+        </p:txBody>
+      </p:sp>
+      <p:sp>
+        <p:nvSpPr>
+          <p:cNvPr id="7" name="Rectangle 6"/>
           <p:cNvSpPr/>
           <p:nvPr/>
         </p:nvSpPr>
         <p:spPr>
           <a:xfrm>
-            <a:off x="411480" y="2503170"/>
-            <a:ext cx="11338560" cy="1223010"/>
-          </a:xfrm>
-          <a:prstGeom prst="rect">
-            <a:avLst/>
-          </a:prstGeom>
-          <a:solidFill>
-            <a:srgbClr val="FFFFFF"/>
-          </a:solidFill>
-          <a:ln w="9525">
-            <a:solidFill>
-              <a:srgbClr val="D0DCDC"/>
-            </a:solidFill>
-          </a:ln>
-          <a:effectLst/>
-        </p:spPr>
-        <p:style>
-          <a:lnRef idx="1">
-            <a:schemeClr val="accent1"/>
-          </a:lnRef>
-          <a:fillRef idx="3">
-            <a:schemeClr val="accent1"/>
-          </a:fillRef>
-          <a:effectRef idx="2">
-            <a:schemeClr val="accent1"/>
-          </a:effectRef>
-          <a:fontRef idx="minor">
-            <a:schemeClr val="lt1"/>
-          </a:fontRef>
-        </p:style>
-        <p:txBody>
-          <a:bodyPr rtlCol="0" anchor="ctr"/>
-          <a:lstStyle/>
-          <a:p>
-            <a:pPr algn="ctr"/>
-          </a:p>
-        </p:txBody>
-      </p:sp>
-      <p:sp>
-        <p:nvSpPr>
-          <p:cNvPr id="10" name="TextBox 9"/>
-          <p:cNvSpPr txBox="1"/>
-          <p:nvPr/>
-        </p:nvSpPr>
-        <p:spPr>
-          <a:xfrm>
-            <a:off x="594360" y="2567178"/>
-            <a:ext cx="2926080" cy="1085850"/>
-          </a:xfrm>
-          <a:prstGeom prst="rect">
-            <a:avLst/>
-          </a:prstGeom>
-          <a:noFill/>
-        </p:spPr>
-        <p:txBody>
-          <a:bodyPr wrap="square" anchor="ctr">
-            <a:spAutoFit/>
-          </a:bodyPr>
-          <a:lstStyle/>
-          <a:p>
-            <a:pPr algn="l">
-              <a:spcAft>
-                <a:spcPts val="0"/>
-              </a:spcAft>
-            </a:pPr>
-            <a:r>
-              <a:rPr sz="1300" b="1" i="0">
-                <a:solidFill>
-                  <a:srgbClr val="0D6E6E"/>
-                </a:solidFill>
-                <a:latin typeface="Calibri"/>
-              </a:rPr>
-              <a:t>Nominees aged 28 or under</a:t>
-            </a:r>
-          </a:p>
-        </p:txBody>
-      </p:sp>
-      <p:sp>
-        <p:nvSpPr>
-          <p:cNvPr id="11" name="TextBox 10"/>
-          <p:cNvSpPr txBox="1"/>
-          <p:nvPr/>
-        </p:nvSpPr>
-        <p:spPr>
-          <a:xfrm>
-            <a:off x="3657600" y="2567178"/>
-            <a:ext cx="7772400" cy="1085850"/>
-          </a:xfrm>
-          <a:prstGeom prst="rect">
-            <a:avLst/>
-          </a:prstGeom>
-          <a:noFill/>
-        </p:spPr>
-        <p:txBody>
-          <a:bodyPr wrap="square" anchor="ctr">
-            <a:spAutoFit/>
-          </a:bodyPr>
-          <a:lstStyle/>
-          <a:p>
-            <a:pPr algn="l">
-              <a:spcAft>
-                <a:spcPts val="0"/>
-              </a:spcAft>
-            </a:pPr>
-            <a:r>
-              <a:rPr sz="1200" b="0" i="0">
-                <a:solidFill>
-                  <a:srgbClr val="3A4A54"/>
-                </a:solidFill>
-                <a:latin typeface="Calibri"/>
-              </a:rPr>
-              <a:t>Delegation will meet age rules</a:t>
-            </a:r>
-          </a:p>
-        </p:txBody>
-      </p:sp>
-      <p:sp>
-        <p:nvSpPr>
-          <p:cNvPr id="12" name="Rectangle 11"/>
-          <p:cNvSpPr/>
-          <p:nvPr/>
-        </p:nvSpPr>
-        <p:spPr>
-          <a:xfrm>
-            <a:off x="411480" y="3817620"/>
-            <a:ext cx="11338560" cy="1223010"/>
-          </a:xfrm>
-          <a:prstGeom prst="rect">
-            <a:avLst/>
-          </a:prstGeom>
-          <a:solidFill>
-            <a:srgbClr val="FFFFFF"/>
-          </a:solidFill>
-          <a:ln w="9525">
-            <a:solidFill>
-              <a:srgbClr val="D0DCDC"/>
-            </a:solidFill>
-          </a:ln>
-          <a:effectLst/>
-        </p:spPr>
-        <p:style>
-          <a:lnRef idx="1">
-            <a:schemeClr val="accent1"/>
-          </a:lnRef>
-          <a:fillRef idx="3">
-            <a:schemeClr val="accent1"/>
-          </a:fillRef>
-          <a:effectRef idx="2">
-            <a:schemeClr val="accent1"/>
-          </a:effectRef>
-          <a:fontRef idx="minor">
-            <a:schemeClr val="lt1"/>
-          </a:fontRef>
-        </p:style>
-        <p:txBody>
-          <a:bodyPr rtlCol="0" anchor="ctr"/>
-          <a:lstStyle/>
-          <a:p>
-            <a:pPr algn="ctr"/>
-          </a:p>
-        </p:txBody>
-      </p:sp>
-      <p:sp>
-        <p:nvSpPr>
-          <p:cNvPr id="13" name="TextBox 12"/>
-          <p:cNvSpPr txBox="1"/>
-          <p:nvPr/>
-        </p:nvSpPr>
-        <p:spPr>
-          <a:xfrm>
-            <a:off x="594360" y="3881628"/>
-            <a:ext cx="2926080" cy="1085850"/>
-          </a:xfrm>
-          <a:prstGeom prst="rect">
-            <a:avLst/>
-          </a:prstGeom>
-          <a:noFill/>
-        </p:spPr>
-        <p:txBody>
-          <a:bodyPr wrap="square" anchor="ctr">
-            <a:spAutoFit/>
-          </a:bodyPr>
-          <a:lstStyle/>
-          <a:p>
-            <a:pPr algn="l">
-              <a:spcAft>
-                <a:spcPts val="0"/>
-              </a:spcAft>
-            </a:pPr>
-            <a:r>
-              <a:rPr sz="1300" b="1" i="0">
-                <a:solidFill>
-                  <a:srgbClr val="0D6E6E"/>
-                </a:solidFill>
-                <a:latin typeface="Calibri"/>
-              </a:rPr>
-              <a:t>Group tickets 3–15</a:t>
-            </a:r>
-          </a:p>
-        </p:txBody>
-      </p:sp>
-      <p:sp>
-        <p:nvSpPr>
-          <p:cNvPr id="14" name="TextBox 13"/>
-          <p:cNvSpPr txBox="1"/>
-          <p:nvPr/>
-        </p:nvSpPr>
-        <p:spPr>
-          <a:xfrm>
-            <a:off x="3657600" y="3881628"/>
-            <a:ext cx="7772400" cy="1085850"/>
-          </a:xfrm>
-          <a:prstGeom prst="rect">
-            <a:avLst/>
-          </a:prstGeom>
-          <a:noFill/>
-        </p:spPr>
-        <p:txBody>
-          <a:bodyPr wrap="square" anchor="ctr">
-            <a:spAutoFit/>
-          </a:bodyPr>
-          <a:lstStyle/>
-          <a:p>
-            <a:pPr algn="l">
-              <a:spcAft>
-                <a:spcPts val="0"/>
-              </a:spcAft>
-            </a:pPr>
-            <a:r>
-              <a:rPr sz="1200" b="0" i="0">
-                <a:solidFill>
-                  <a:srgbClr val="3A4A54"/>
-                </a:solidFill>
-                <a:latin typeface="Calibri"/>
-              </a:rPr>
-              <a:t>We request a mid-size learning group</a:t>
-            </a:r>
-          </a:p>
-        </p:txBody>
-      </p:sp>
-      <p:sp>
-        <p:nvSpPr>
-          <p:cNvPr id="15" name="Rectangle 14"/>
-          <p:cNvSpPr/>
-          <p:nvPr/>
-        </p:nvSpPr>
-        <p:spPr>
-          <a:xfrm>
-            <a:off x="411480" y="5132070"/>
-            <a:ext cx="11338560" cy="1223010"/>
-          </a:xfrm>
-          <a:prstGeom prst="rect">
-            <a:avLst/>
-          </a:prstGeom>
-          <a:solidFill>
-            <a:srgbClr val="FFFFFF"/>
-          </a:solidFill>
-          <a:ln w="9525">
-            <a:solidFill>
-              <a:srgbClr val="D0DCDC"/>
-            </a:solidFill>
-          </a:ln>
-          <a:effectLst/>
-        </p:spPr>
-        <p:style>
-          <a:lnRef idx="1">
-            <a:schemeClr val="accent1"/>
-          </a:lnRef>
-          <a:fillRef idx="3">
-            <a:schemeClr val="accent1"/>
-          </a:fillRef>
-          <a:effectRef idx="2">
-            <a:schemeClr val="accent1"/>
-          </a:effectRef>
-          <a:fontRef idx="minor">
-            <a:schemeClr val="lt1"/>
-          </a:fontRef>
-        </p:style>
-        <p:txBody>
-          <a:bodyPr rtlCol="0" anchor="ctr"/>
-          <a:lstStyle/>
-          <a:p>
-            <a:pPr algn="ctr"/>
-          </a:p>
-        </p:txBody>
-      </p:sp>
-      <p:sp>
-        <p:nvSpPr>
-          <p:cNvPr id="16" name="TextBox 15"/>
-          <p:cNvSpPr txBox="1"/>
-          <p:nvPr/>
-        </p:nvSpPr>
-        <p:spPr>
-          <a:xfrm>
-            <a:off x="594360" y="5196078"/>
-            <a:ext cx="2926080" cy="1085850"/>
-          </a:xfrm>
-          <a:prstGeom prst="rect">
-            <a:avLst/>
-          </a:prstGeom>
-          <a:noFill/>
-        </p:spPr>
-        <p:txBody>
-          <a:bodyPr wrap="square" anchor="ctr">
-            <a:spAutoFit/>
-          </a:bodyPr>
-          <a:lstStyle/>
-          <a:p>
-            <a:pPr algn="l">
-              <a:spcAft>
-                <a:spcPts val="0"/>
-              </a:spcAft>
-            </a:pPr>
-            <a:r>
-              <a:rPr sz="1300" b="1" i="0">
-                <a:solidFill>
-                  <a:srgbClr val="0D6E6E"/>
-                </a:solidFill>
-                <a:latin typeface="Calibri"/>
-              </a:rPr>
-              <a:t>Self-funded travel</a:t>
-            </a:r>
-          </a:p>
-        </p:txBody>
-      </p:sp>
-      <p:sp>
-        <p:nvSpPr>
-          <p:cNvPr id="17" name="TextBox 16"/>
-          <p:cNvSpPr txBox="1"/>
-          <p:nvPr/>
-        </p:nvSpPr>
-        <p:spPr>
-          <a:xfrm>
-            <a:off x="3657600" y="5196078"/>
-            <a:ext cx="7772400" cy="1085850"/>
-          </a:xfrm>
-          <a:prstGeom prst="rect">
-            <a:avLst/>
-          </a:prstGeom>
-          <a:noFill/>
-        </p:spPr>
-        <p:txBody>
-          <a:bodyPr wrap="square" anchor="ctr">
-            <a:spAutoFit/>
-          </a:bodyPr>
-          <a:lstStyle/>
-          <a:p>
-            <a:pPr algn="l">
-              <a:spcAft>
-                <a:spcPts val="0"/>
-              </a:spcAft>
-            </a:pPr>
-            <a:r>
-              <a:rPr sz="1200" b="0" i="0">
-                <a:solidFill>
-                  <a:srgbClr val="3A4A54"/>
-                </a:solidFill>
-                <a:latin typeface="Calibri"/>
-              </a:rPr>
-              <a:t>Understood and planned separately from ticket request</a:t>
-            </a:r>
-          </a:p>
-        </p:txBody>
-      </p:sp>
-      <p:sp>
-        <p:nvSpPr>
-          <p:cNvPr id="18" name="Rectangle 17"/>
-          <p:cNvSpPr/>
-          <p:nvPr/>
-        </p:nvSpPr>
-        <p:spPr>
-          <a:xfrm>
-            <a:off x="0" y="6565392"/>
-            <a:ext cx="12191695" cy="292608"/>
+            <a:off x="0" y="6583680"/>
+            <a:ext cx="12191695" cy="274320"/>
           </a:xfrm>
           <a:prstGeom prst="rect">
             <a:avLst/>
@@ -5712,7 +4488,6 @@
           <a:ln>
             <a:noFill/>
           </a:ln>
-          <a:effectLst/>
         </p:spPr>
         <p:style>
           <a:lnRef idx="1">
@@ -5738,14 +4513,14 @@
       </p:sp>
       <p:sp>
         <p:nvSpPr>
-          <p:cNvPr id="19" name="TextBox 18"/>
+          <p:cNvPr id="8" name="TextBox 7"/>
           <p:cNvSpPr txBox="1"/>
           <p:nvPr/>
         </p:nvSpPr>
         <p:spPr>
           <a:xfrm>
-            <a:off x="365760" y="6574536"/>
-            <a:ext cx="9144000" cy="274320"/>
+            <a:off x="365760" y="6601968"/>
+            <a:ext cx="10058400" cy="228600"/>
           </a:xfrm>
           <a:prstGeom prst="rect">
             <a:avLst/>
@@ -5753,16 +4528,12 @@
           <a:noFill/>
         </p:spPr>
         <p:txBody>
-          <a:bodyPr wrap="square" anchor="ctr">
+          <a:bodyPr wrap="square">
             <a:spAutoFit/>
           </a:bodyPr>
           <a:lstStyle/>
           <a:p>
-            <a:pPr algn="l">
-              <a:spcAft>
-                <a:spcPts val="0"/>
-              </a:spcAft>
-            </a:pPr>
+            <a:pPr algn="l"/>
             <a:r>
               <a:rPr sz="900" b="0" i="0">
                 <a:solidFill>
@@ -5770,21 +4541,21 @@
                 </a:solidFill>
                 <a:latin typeface="Calibri"/>
               </a:rPr>
-              <a:t>FairBanks FCHIP  |  World Health Summit 2026 Youth Group Opp  |  Your health, our mission.</a:t>
-            </a:r>
-          </a:p>
-        </p:txBody>
-      </p:sp>
-      <p:sp>
-        <p:nvSpPr>
-          <p:cNvPr id="20" name="TextBox 19"/>
+              <a:t>FairBanks Youth Delegation  |  WHS 2026 Berlin  |  Your health, our mission.</a:t>
+            </a:r>
+          </a:p>
+        </p:txBody>
+      </p:sp>
+      <p:sp>
+        <p:nvSpPr>
+          <p:cNvPr id="9" name="TextBox 8"/>
           <p:cNvSpPr txBox="1"/>
           <p:nvPr/>
         </p:nvSpPr>
         <p:spPr>
           <a:xfrm>
-            <a:off x="11094415" y="6574536"/>
-            <a:ext cx="731520" cy="274320"/>
+            <a:off x="11368735" y="6601968"/>
+            <a:ext cx="548640" cy="228600"/>
           </a:xfrm>
           <a:prstGeom prst="rect">
             <a:avLst/>
@@ -5792,16 +4563,12 @@
           <a:noFill/>
         </p:spPr>
         <p:txBody>
-          <a:bodyPr wrap="square" anchor="ctr">
+          <a:bodyPr wrap="square">
             <a:spAutoFit/>
           </a:bodyPr>
           <a:lstStyle/>
           <a:p>
-            <a:pPr algn="r">
-              <a:spcAft>
-                <a:spcPts val="0"/>
-              </a:spcAft>
-            </a:pPr>
+            <a:pPr algn="r"/>
             <a:r>
               <a:rPr sz="900" b="0" i="0">
                 <a:solidFill>
@@ -5841,7 +4608,7 @@
         <p:spPr>
           <a:xfrm>
             <a:off x="0" y="0"/>
-            <a:ext cx="12191695" cy="960120"/>
+            <a:ext cx="12191695" cy="868680"/>
           </a:xfrm>
           <a:prstGeom prst="rect">
             <a:avLst/>
@@ -5852,7 +4619,6 @@
           <a:ln>
             <a:noFill/>
           </a:ln>
-          <a:effectLst/>
         </p:spPr>
         <p:style>
           <a:lnRef idx="1">
@@ -5885,18 +4651,17 @@
         <p:spPr>
           <a:xfrm>
             <a:off x="0" y="0"/>
-            <a:ext cx="164592" cy="960120"/>
+            <a:ext cx="109728" cy="868680"/>
           </a:xfrm>
           <a:prstGeom prst="rect">
             <a:avLst/>
           </a:prstGeom>
           <a:solidFill>
-            <a:srgbClr val="0D6E6E"/>
+            <a:srgbClr val="C45C26"/>
           </a:solidFill>
           <a:ln>
             <a:noFill/>
           </a:ln>
-          <a:effectLst/>
         </p:spPr>
         <p:style>
           <a:lnRef idx="1">
@@ -5928,8 +4693,8 @@
         </p:nvSpPr>
         <p:spPr>
           <a:xfrm>
-            <a:off x="457200" y="109728"/>
-            <a:ext cx="10972800" cy="256032"/>
+            <a:off x="411480" y="182880"/>
+            <a:ext cx="10972800" cy="548640"/>
           </a:xfrm>
           <a:prstGeom prst="rect">
             <a:avLst/>
@@ -5937,70 +4702,27 @@
           <a:noFill/>
         </p:spPr>
         <p:txBody>
-          <a:bodyPr wrap="square" anchor="t">
+          <a:bodyPr wrap="square">
             <a:spAutoFit/>
           </a:bodyPr>
           <a:lstStyle/>
           <a:p>
-            <a:pPr algn="l">
-              <a:spcAft>
-                <a:spcPts val="0"/>
-              </a:spcAft>
-            </a:pPr>
-            <a:r>
-              <a:rPr sz="1100" b="1" i="0">
-                <a:solidFill>
-                  <a:srgbClr val="C45C26"/>
-                </a:solidFill>
-                <a:latin typeface="Calibri"/>
-              </a:rPr>
-              <a:t>WHY FAIRBANKS</a:t>
-            </a:r>
-          </a:p>
-        </p:txBody>
-      </p:sp>
-      <p:sp>
-        <p:nvSpPr>
-          <p:cNvPr id="5" name="TextBox 4"/>
-          <p:cNvSpPr txBox="1"/>
-          <p:nvPr/>
-        </p:nvSpPr>
-        <p:spPr>
-          <a:xfrm>
-            <a:off x="457200" y="384048"/>
-            <a:ext cx="11247120" cy="475488"/>
-          </a:xfrm>
-          <a:prstGeom prst="rect">
-            <a:avLst/>
-          </a:prstGeom>
-          <a:noFill/>
-        </p:spPr>
-        <p:txBody>
-          <a:bodyPr wrap="square" anchor="t">
-            <a:spAutoFit/>
-          </a:bodyPr>
-          <a:lstStyle/>
-          <a:p>
-            <a:pPr algn="l">
-              <a:spcAft>
-                <a:spcPts val="0"/>
-              </a:spcAft>
-            </a:pPr>
-            <a:r>
-              <a:rPr sz="2200" b="1" i="0">
+            <a:pPr algn="l"/>
+            <a:r>
+              <a:rPr sz="2400" b="1" i="0">
                 <a:solidFill>
                   <a:srgbClr val="0A1F2E"/>
                 </a:solidFill>
                 <a:latin typeface="Calibri"/>
               </a:rPr>
-              <a:t>A live community health ecosystem</a:t>
+              <a:t>After the summit</a:t>
             </a:r>
           </a:p>
         </p:txBody>
       </p:sp>
       <p:pic>
         <p:nvPicPr>
-          <p:cNvPr id="6" name="Picture 5" descr="outreach_facilitator_canopy_01_opt.jpg"/>
+          <p:cNvPr id="5" name="Picture 4" descr="outreach_community_speaker_01_opt.jpg"/>
           <p:cNvPicPr>
             <a:picLocks noChangeAspect="1"/>
           </p:cNvPicPr>
@@ -6014,8 +4736,8 @@
         </p:blipFill>
         <p:spPr>
           <a:xfrm>
-            <a:off x="411480" y="1943753"/>
-            <a:ext cx="5486400" cy="3656293"/>
+            <a:off x="365760" y="1950720"/>
+            <a:ext cx="5120640" cy="3413760"/>
           </a:xfrm>
           <a:prstGeom prst="rect">
             <a:avLst/>
@@ -6024,14 +4746,14 @@
       </p:pic>
       <p:sp>
         <p:nvSpPr>
-          <p:cNvPr id="7" name="TextBox 6"/>
+          <p:cNvPr id="6" name="TextBox 5"/>
           <p:cNvSpPr txBox="1"/>
           <p:nvPr/>
         </p:nvSpPr>
         <p:spPr>
           <a:xfrm>
-            <a:off x="6217920" y="1234440"/>
-            <a:ext cx="5486400" cy="5074920"/>
+            <a:off x="5669280" y="1005840"/>
+            <a:ext cx="6126480" cy="5303520"/>
           </a:xfrm>
           <a:prstGeom prst="rect">
             <a:avLst/>
@@ -6044,113 +4766,53 @@
           </a:bodyPr>
           <a:lstStyle/>
           <a:p>
-            <a:pPr>
-              <a:spcAft>
-                <a:spcPts val="800"/>
-              </a:spcAft>
-            </a:pPr>
-            <a:r>
-              <a:rPr sz="1400">
+            <a:pPr algn="l"/>
+            <a:r>
+              <a:rPr sz="1500" b="0" i="0">
                 <a:solidFill>
                   <a:srgbClr val="1E2F38"/>
                 </a:solidFill>
                 <a:latin typeface="Calibri"/>
               </a:rPr>
-              <a:t>•  Functioning FairBanks Medical Centre with clinic, pharmacy, and diagnostics</a:t>
-            </a:r>
-          </a:p>
-          <a:p>
-            <a:pPr>
-              <a:spcAft>
-                <a:spcPts val="800"/>
-              </a:spcAft>
-            </a:pPr>
-            <a:r>
-              <a:rPr sz="1400">
+              <a:t>Within 30 days of return: host a community briefing for CHWs, VHTs, and FairBanks staff</a:t>
+            </a:r>
+          </a:p>
+          <a:p>
+            <a:pPr algn="l"/>
+            <a:r>
+              <a:rPr sz="1500" b="0" i="0">
                 <a:solidFill>
                   <a:srgbClr val="1E2F38"/>
                 </a:solidFill>
                 <a:latin typeface="Calibri"/>
               </a:rPr>
-              <a:t>•  Active Community Reach outreach in Bukoto, Kyebando, Kisaasi, Kamwokya, Kikaaya</a:t>
-            </a:r>
-          </a:p>
-          <a:p>
-            <a:pPr>
-              <a:spcAft>
-                <a:spcPts val="800"/>
-              </a:spcAft>
-            </a:pPr>
-            <a:r>
-              <a:rPr sz="1400">
+              <a:t/>
+            </a:r>
+          </a:p>
+          <a:p>
+            <a:pPr algn="l"/>
+            <a:r>
+              <a:rPr sz="1500" b="0" i="0">
                 <a:solidFill>
                   <a:srgbClr val="1E2F38"/>
                 </a:solidFill>
                 <a:latin typeface="Calibri"/>
               </a:rPr>
-              <a:t>•  Trusted CHW and VHT relationships for household visits and referrals</a:t>
-            </a:r>
-          </a:p>
-          <a:p>
-            <a:pPr>
-              <a:spcAft>
-                <a:spcPts val="800"/>
-              </a:spcAft>
-            </a:pPr>
-            <a:r>
-              <a:rPr sz="1400">
-                <a:solidFill>
-                  <a:srgbClr val="1E2F38"/>
-                </a:solidFill>
-                <a:latin typeface="Calibri"/>
-              </a:rPr>
-              <a:t>•  Live programmes: maternal &amp; child health, Gericare, chronic-disease screening</a:t>
-            </a:r>
-          </a:p>
-          <a:p>
-            <a:pPr>
-              <a:spcAft>
-                <a:spcPts val="800"/>
-              </a:spcAft>
-            </a:pPr>
-            <a:r>
-              <a:rPr sz="1400">
-                <a:solidFill>
-                  <a:srgbClr val="1E2F38"/>
-                </a:solidFill>
-                <a:latin typeface="Calibri"/>
-              </a:rPr>
-              <a:t>•  Digital health records and outreach data ready to feed FCHIP</a:t>
-            </a:r>
-          </a:p>
-          <a:p>
-            <a:pPr>
-              <a:spcAft>
-                <a:spcPts val="800"/>
-              </a:spcAft>
-            </a:pPr>
-            <a:r>
-              <a:rPr sz="1400">
-                <a:solidFill>
-                  <a:srgbClr val="1E2F38"/>
-                </a:solidFill>
-                <a:latin typeface="Calibri"/>
-              </a:rPr>
-              <a:t>•  Research and partnership mindset for ethical, evidence-based scale</a:t>
-            </a:r>
-          </a:p>
-        </p:txBody>
-      </p:sp>
-      <p:sp>
-        <p:nvSpPr>
-          <p:cNvPr id="8" name="Rectangle 7"/>
+              <a:t>Integrate at least three summit insights into FairBanks outreach plans for Q4 2026</a:t>
+            </a:r>
+          </a:p>
+        </p:txBody>
+      </p:sp>
+      <p:sp>
+        <p:nvSpPr>
+          <p:cNvPr id="7" name="Rectangle 6"/>
           <p:cNvSpPr/>
           <p:nvPr/>
         </p:nvSpPr>
         <p:spPr>
           <a:xfrm>
-            <a:off x="0" y="6565392"/>
-            <a:ext cx="12191695" cy="292608"/>
+            <a:off x="0" y="6583680"/>
+            <a:ext cx="12191695" cy="274320"/>
           </a:xfrm>
           <a:prstGeom prst="rect">
             <a:avLst/>
@@ -6161,7 +4823,6 @@
           <a:ln>
             <a:noFill/>
           </a:ln>
-          <a:effectLst/>
         </p:spPr>
         <p:style>
           <a:lnRef idx="1">
@@ -6187,14 +4848,14 @@
       </p:sp>
       <p:sp>
         <p:nvSpPr>
-          <p:cNvPr id="9" name="TextBox 8"/>
+          <p:cNvPr id="8" name="TextBox 7"/>
           <p:cNvSpPr txBox="1"/>
           <p:nvPr/>
         </p:nvSpPr>
         <p:spPr>
           <a:xfrm>
-            <a:off x="365760" y="6574536"/>
-            <a:ext cx="9144000" cy="274320"/>
+            <a:off x="365760" y="6601968"/>
+            <a:ext cx="10058400" cy="228600"/>
           </a:xfrm>
           <a:prstGeom prst="rect">
             <a:avLst/>
@@ -6202,16 +4863,12 @@
           <a:noFill/>
         </p:spPr>
         <p:txBody>
-          <a:bodyPr wrap="square" anchor="ctr">
+          <a:bodyPr wrap="square">
             <a:spAutoFit/>
           </a:bodyPr>
           <a:lstStyle/>
           <a:p>
-            <a:pPr algn="l">
-              <a:spcAft>
-                <a:spcPts val="0"/>
-              </a:spcAft>
-            </a:pPr>
+            <a:pPr algn="l"/>
             <a:r>
               <a:rPr sz="900" b="0" i="0">
                 <a:solidFill>
@@ -6219,21 +4876,21 @@
                 </a:solidFill>
                 <a:latin typeface="Calibri"/>
               </a:rPr>
-              <a:t>FairBanks FCHIP  |  World Health Summit 2026 Youth Group Opp  |  Your health, our mission.</a:t>
-            </a:r>
-          </a:p>
-        </p:txBody>
-      </p:sp>
-      <p:sp>
-        <p:nvSpPr>
-          <p:cNvPr id="10" name="TextBox 9"/>
+              <a:t>FairBanks Youth Delegation  |  WHS 2026 Berlin  |  Your health, our mission.</a:t>
+            </a:r>
+          </a:p>
+        </p:txBody>
+      </p:sp>
+      <p:sp>
+        <p:nvSpPr>
+          <p:cNvPr id="9" name="TextBox 8"/>
           <p:cNvSpPr txBox="1"/>
           <p:nvPr/>
         </p:nvSpPr>
         <p:spPr>
           <a:xfrm>
-            <a:off x="11094415" y="6574536"/>
-            <a:ext cx="731520" cy="274320"/>
+            <a:off x="11368735" y="6601968"/>
+            <a:ext cx="548640" cy="228600"/>
           </a:xfrm>
           <a:prstGeom prst="rect">
             <a:avLst/>
@@ -6241,16 +4898,12 @@
           <a:noFill/>
         </p:spPr>
         <p:txBody>
-          <a:bodyPr wrap="square" anchor="ctr">
+          <a:bodyPr wrap="square">
             <a:spAutoFit/>
           </a:bodyPr>
           <a:lstStyle/>
           <a:p>
-            <a:pPr algn="r">
-              <a:spcAft>
-                <a:spcPts val="0"/>
-              </a:spcAft>
-            </a:pPr>
+            <a:pPr algn="r"/>
             <a:r>
               <a:rPr sz="900" b="0" i="0">
                 <a:solidFill>
@@ -6290,7 +4943,7 @@
         <p:spPr>
           <a:xfrm>
             <a:off x="0" y="0"/>
-            <a:ext cx="12191695" cy="960120"/>
+            <a:ext cx="12191695" cy="868680"/>
           </a:xfrm>
           <a:prstGeom prst="rect">
             <a:avLst/>
@@ -6301,7 +4954,6 @@
           <a:ln>
             <a:noFill/>
           </a:ln>
-          <a:effectLst/>
         </p:spPr>
         <p:style>
           <a:lnRef idx="1">
@@ -6334,18 +4986,17 @@
         <p:spPr>
           <a:xfrm>
             <a:off x="0" y="0"/>
-            <a:ext cx="164592" cy="960120"/>
+            <a:ext cx="109728" cy="868680"/>
           </a:xfrm>
           <a:prstGeom prst="rect">
             <a:avLst/>
           </a:prstGeom>
           <a:solidFill>
-            <a:srgbClr val="0D6E6E"/>
+            <a:srgbClr val="C45C26"/>
           </a:solidFill>
           <a:ln>
             <a:noFill/>
           </a:ln>
-          <a:effectLst/>
         </p:spPr>
         <p:style>
           <a:lnRef idx="1">
@@ -6377,8 +5028,8 @@
         </p:nvSpPr>
         <p:spPr>
           <a:xfrm>
-            <a:off x="457200" y="109728"/>
-            <a:ext cx="10972800" cy="256032"/>
+            <a:off x="411480" y="182880"/>
+            <a:ext cx="10972800" cy="548640"/>
           </a:xfrm>
           <a:prstGeom prst="rect">
             <a:avLst/>
@@ -6386,157 +5037,27 @@
           <a:noFill/>
         </p:spPr>
         <p:txBody>
-          <a:bodyPr wrap="square" anchor="t">
+          <a:bodyPr wrap="square">
             <a:spAutoFit/>
           </a:bodyPr>
           <a:lstStyle/>
           <a:p>
-            <a:pPr algn="l">
-              <a:spcAft>
-                <a:spcPts val="0"/>
-              </a:spcAft>
-            </a:pPr>
-            <a:r>
-              <a:rPr sz="1100" b="1" i="0">
-                <a:solidFill>
-                  <a:srgbClr val="C45C26"/>
-                </a:solidFill>
-                <a:latin typeface="Calibri"/>
-              </a:rPr>
-              <a:t>THE PLAN</a:t>
-            </a:r>
-          </a:p>
-        </p:txBody>
-      </p:sp>
-      <p:sp>
-        <p:nvSpPr>
-          <p:cNvPr id="5" name="TextBox 4"/>
-          <p:cNvSpPr txBox="1"/>
-          <p:nvPr/>
-        </p:nvSpPr>
-        <p:spPr>
-          <a:xfrm>
-            <a:off x="457200" y="384048"/>
-            <a:ext cx="11247120" cy="475488"/>
-          </a:xfrm>
-          <a:prstGeom prst="rect">
-            <a:avLst/>
-          </a:prstGeom>
-          <a:noFill/>
-        </p:spPr>
-        <p:txBody>
-          <a:bodyPr wrap="square" anchor="t">
-            <a:spAutoFit/>
-          </a:bodyPr>
-          <a:lstStyle/>
-          <a:p>
-            <a:pPr algn="l">
-              <a:spcAft>
-                <a:spcPts val="0"/>
-              </a:spcAft>
-            </a:pPr>
-            <a:r>
-              <a:rPr sz="2200" b="1" i="0">
+            <a:pPr algn="l"/>
+            <a:r>
+              <a:rPr sz="2400" b="1" i="0">
                 <a:solidFill>
                   <a:srgbClr val="0A1F2E"/>
                 </a:solidFill>
                 <a:latin typeface="Calibri"/>
               </a:rPr>
-              <a:t>Delegation and learning plan</a:t>
-            </a:r>
-          </a:p>
-        </p:txBody>
-      </p:sp>
-      <p:sp>
-        <p:nvSpPr>
-          <p:cNvPr id="6" name="TextBox 5"/>
-          <p:cNvSpPr txBox="1"/>
-          <p:nvPr/>
-        </p:nvSpPr>
-        <p:spPr>
-          <a:xfrm>
-            <a:off x="502920" y="1234440"/>
-            <a:ext cx="5760720" cy="5074920"/>
-          </a:xfrm>
-          <a:prstGeom prst="rect">
-            <a:avLst/>
-          </a:prstGeom>
-          <a:noFill/>
-        </p:spPr>
-        <p:txBody>
-          <a:bodyPr wrap="square">
-            <a:spAutoFit/>
-          </a:bodyPr>
-          <a:lstStyle/>
-          <a:p>
-            <a:pPr>
-              <a:spcAft>
-                <a:spcPts val="800"/>
-              </a:spcAft>
-            </a:pPr>
-            <a:r>
-              <a:rPr sz="1500">
-                <a:solidFill>
-                  <a:srgbClr val="1E2F38"/>
-                </a:solidFill>
-                <a:latin typeface="Calibri"/>
-              </a:rPr>
-              <a:t>•  Select diverse youth nominees (clinical, community, digital) under 28</a:t>
-            </a:r>
-          </a:p>
-          <a:p>
-            <a:pPr>
-              <a:spcAft>
-                <a:spcPts val="800"/>
-              </a:spcAft>
-            </a:pPr>
-            <a:r>
-              <a:rPr sz="1500">
-                <a:solidFill>
-                  <a:srgbClr val="1E2F38"/>
-                </a:solidFill>
-                <a:latin typeface="Calibri"/>
-              </a:rPr>
-              <a:t>•  Prepare a one-page FairBanks brief for networking</a:t>
-            </a:r>
-          </a:p>
-          <a:p>
-            <a:pPr>
-              <a:spcAft>
-                <a:spcPts val="800"/>
-              </a:spcAft>
-            </a:pPr>
-            <a:r>
-              <a:rPr sz="1500">
-                <a:solidFill>
-                  <a:srgbClr val="1E2F38"/>
-                </a:solidFill>
-                <a:latin typeface="Calibri"/>
-              </a:rPr>
-              <a:t>•  Attend all three summit days with a session tracking plan</a:t>
-            </a:r>
-          </a:p>
-          <a:p>
-            <a:pPr>
-              <a:spcAft>
-                <a:spcPts val="800"/>
-              </a:spcAft>
-            </a:pPr>
-            <a:r>
-              <a:rPr sz="1500">
-                <a:solidFill>
-                  <a:srgbClr val="1E2F38"/>
-                </a:solidFill>
-                <a:latin typeface="Calibri"/>
-              </a:rPr>
-              <a:t>•  Host a post-summit community briefing within 30 days of return</a:t>
+              <a:t>Travel note</a:t>
             </a:r>
           </a:p>
         </p:txBody>
       </p:sp>
       <p:pic>
         <p:nvPicPr>
-          <p:cNvPr id="7" name="Picture 6" descr="indoor_training_staff_presenting_01_opt.jpg"/>
+          <p:cNvPr id="5" name="Picture 4" descr="outreach_cofacilitators_01_opt.jpg"/>
           <p:cNvPicPr>
             <a:picLocks noChangeAspect="1"/>
           </p:cNvPicPr>
@@ -6550,8 +5071,8 @@
         </p:blipFill>
         <p:spPr>
           <a:xfrm>
-            <a:off x="6492240" y="2035160"/>
-            <a:ext cx="5212080" cy="3473479"/>
+            <a:off x="365760" y="1950720"/>
+            <a:ext cx="5120640" cy="3413760"/>
           </a:xfrm>
           <a:prstGeom prst="rect">
             <a:avLst/>
@@ -6560,14 +5081,49 @@
       </p:pic>
       <p:sp>
         <p:nvSpPr>
-          <p:cNvPr id="8" name="Rectangle 7"/>
+          <p:cNvPr id="6" name="TextBox 5"/>
+          <p:cNvSpPr txBox="1"/>
+          <p:nvPr/>
+        </p:nvSpPr>
+        <p:spPr>
+          <a:xfrm>
+            <a:off x="5669280" y="1005840"/>
+            <a:ext cx="6126480" cy="5303520"/>
+          </a:xfrm>
+          <a:prstGeom prst="rect">
+            <a:avLst/>
+          </a:prstGeom>
+          <a:noFill/>
+        </p:spPr>
+        <p:txBody>
+          <a:bodyPr wrap="square">
+            <a:spAutoFit/>
+          </a:bodyPr>
+          <a:lstStyle/>
+          <a:p>
+            <a:pPr algn="l"/>
+            <a:r>
+              <a:rPr sz="1500" b="0" i="0">
+                <a:solidFill>
+                  <a:srgbClr val="1E2F38"/>
+                </a:solidFill>
+                <a:latin typeface="Calibri"/>
+              </a:rPr>
+              <a:t>We understand that complimentary WHS tickets cover summit registration only. FairBanks will self-fund travel, visa, and accommodation for nominated delegates aged 28 or under, as required by the programme. This commitment is documented here — not on the cover page.</a:t>
+            </a:r>
+          </a:p>
+        </p:txBody>
+      </p:sp>
+      <p:sp>
+        <p:nvSpPr>
+          <p:cNvPr id="7" name="Rectangle 6"/>
           <p:cNvSpPr/>
           <p:nvPr/>
         </p:nvSpPr>
         <p:spPr>
           <a:xfrm>
-            <a:off x="0" y="6565392"/>
-            <a:ext cx="12191695" cy="292608"/>
+            <a:off x="0" y="6583680"/>
+            <a:ext cx="12191695" cy="274320"/>
           </a:xfrm>
           <a:prstGeom prst="rect">
             <a:avLst/>
@@ -6578,7 +5134,6 @@
           <a:ln>
             <a:noFill/>
           </a:ln>
-          <a:effectLst/>
         </p:spPr>
         <p:style>
           <a:lnRef idx="1">
@@ -6604,14 +5159,14 @@
       </p:sp>
       <p:sp>
         <p:nvSpPr>
-          <p:cNvPr id="9" name="TextBox 8"/>
+          <p:cNvPr id="8" name="TextBox 7"/>
           <p:cNvSpPr txBox="1"/>
           <p:nvPr/>
         </p:nvSpPr>
         <p:spPr>
           <a:xfrm>
-            <a:off x="365760" y="6574536"/>
-            <a:ext cx="9144000" cy="274320"/>
+            <a:off x="365760" y="6601968"/>
+            <a:ext cx="10058400" cy="228600"/>
           </a:xfrm>
           <a:prstGeom prst="rect">
             <a:avLst/>
@@ -6619,16 +5174,12 @@
           <a:noFill/>
         </p:spPr>
         <p:txBody>
-          <a:bodyPr wrap="square" anchor="ctr">
+          <a:bodyPr wrap="square">
             <a:spAutoFit/>
           </a:bodyPr>
           <a:lstStyle/>
           <a:p>
-            <a:pPr algn="l">
-              <a:spcAft>
-                <a:spcPts val="0"/>
-              </a:spcAft>
-            </a:pPr>
+            <a:pPr algn="l"/>
             <a:r>
               <a:rPr sz="900" b="0" i="0">
                 <a:solidFill>
@@ -6636,21 +5187,21 @@
                 </a:solidFill>
                 <a:latin typeface="Calibri"/>
               </a:rPr>
-              <a:t>FairBanks FCHIP  |  World Health Summit 2026 Youth Group Opp  |  Your health, our mission.</a:t>
-            </a:r>
-          </a:p>
-        </p:txBody>
-      </p:sp>
-      <p:sp>
-        <p:nvSpPr>
-          <p:cNvPr id="10" name="TextBox 9"/>
+              <a:t>FairBanks Youth Delegation  |  WHS 2026 Berlin  |  Your health, our mission.</a:t>
+            </a:r>
+          </a:p>
+        </p:txBody>
+      </p:sp>
+      <p:sp>
+        <p:nvSpPr>
+          <p:cNvPr id="9" name="TextBox 8"/>
           <p:cNvSpPr txBox="1"/>
           <p:nvPr/>
         </p:nvSpPr>
         <p:spPr>
           <a:xfrm>
-            <a:off x="11094415" y="6574536"/>
-            <a:ext cx="731520" cy="274320"/>
+            <a:off x="11368735" y="6601968"/>
+            <a:ext cx="548640" cy="228600"/>
           </a:xfrm>
           <a:prstGeom prst="rect">
             <a:avLst/>
@@ -6658,16 +5209,12 @@
           <a:noFill/>
         </p:spPr>
         <p:txBody>
-          <a:bodyPr wrap="square" anchor="ctr">
+          <a:bodyPr wrap="square">
             <a:spAutoFit/>
           </a:bodyPr>
           <a:lstStyle/>
           <a:p>
-            <a:pPr algn="r">
-              <a:spcAft>
-                <a:spcPts val="0"/>
-              </a:spcAft>
-            </a:pPr>
+            <a:pPr algn="r"/>
             <a:r>
               <a:rPr sz="900" b="0" i="0">
                 <a:solidFill>
@@ -6676,1529 +5223,6 @@
                 <a:latin typeface="Calibri"/>
               </a:rPr>
               <a:t>7</a:t>
-            </a:r>
-          </a:p>
-        </p:txBody>
-      </p:sp>
-    </p:spTree>
-  </p:cSld>
-  <p:clrMapOvr>
-    <a:masterClrMapping/>
-  </p:clrMapOvr>
-</p:sld>
-</file>
-
-<file path=ppt/slides/slide8.xml><?xml version="1.0" encoding="utf-8"?>
-<p:sld xmlns:a="http://schemas.openxmlformats.org/drawingml/2006/main" xmlns:p="http://schemas.openxmlformats.org/presentationml/2006/main" xmlns:r="http://schemas.openxmlformats.org/officeDocument/2006/relationships">
-  <p:cSld>
-    <p:spTree>
-      <p:nvGrpSpPr>
-        <p:cNvPr id="1" name=""/>
-        <p:cNvGrpSpPr/>
-        <p:nvPr/>
-      </p:nvGrpSpPr>
-      <p:grpSpPr/>
-      <p:sp>
-        <p:nvSpPr>
-          <p:cNvPr id="2" name="Rectangle 1"/>
-          <p:cNvSpPr/>
-          <p:nvPr/>
-        </p:nvSpPr>
-        <p:spPr>
-          <a:xfrm>
-            <a:off x="0" y="0"/>
-            <a:ext cx="12191695" cy="960120"/>
-          </a:xfrm>
-          <a:prstGeom prst="rect">
-            <a:avLst/>
-          </a:prstGeom>
-          <a:solidFill>
-            <a:srgbClr val="F7F5F0"/>
-          </a:solidFill>
-          <a:ln>
-            <a:noFill/>
-          </a:ln>
-          <a:effectLst/>
-        </p:spPr>
-        <p:style>
-          <a:lnRef idx="1">
-            <a:schemeClr val="accent1"/>
-          </a:lnRef>
-          <a:fillRef idx="3">
-            <a:schemeClr val="accent1"/>
-          </a:fillRef>
-          <a:effectRef idx="2">
-            <a:schemeClr val="accent1"/>
-          </a:effectRef>
-          <a:fontRef idx="minor">
-            <a:schemeClr val="lt1"/>
-          </a:fontRef>
-        </p:style>
-        <p:txBody>
-          <a:bodyPr rtlCol="0" anchor="ctr"/>
-          <a:lstStyle/>
-          <a:p>
-            <a:pPr algn="ctr"/>
-          </a:p>
-        </p:txBody>
-      </p:sp>
-      <p:sp>
-        <p:nvSpPr>
-          <p:cNvPr id="3" name="Rectangle 2"/>
-          <p:cNvSpPr/>
-          <p:nvPr/>
-        </p:nvSpPr>
-        <p:spPr>
-          <a:xfrm>
-            <a:off x="0" y="0"/>
-            <a:ext cx="164592" cy="960120"/>
-          </a:xfrm>
-          <a:prstGeom prst="rect">
-            <a:avLst/>
-          </a:prstGeom>
-          <a:solidFill>
-            <a:srgbClr val="0D6E6E"/>
-          </a:solidFill>
-          <a:ln>
-            <a:noFill/>
-          </a:ln>
-          <a:effectLst/>
-        </p:spPr>
-        <p:style>
-          <a:lnRef idx="1">
-            <a:schemeClr val="accent1"/>
-          </a:lnRef>
-          <a:fillRef idx="3">
-            <a:schemeClr val="accent1"/>
-          </a:fillRef>
-          <a:effectRef idx="2">
-            <a:schemeClr val="accent1"/>
-          </a:effectRef>
-          <a:fontRef idx="minor">
-            <a:schemeClr val="lt1"/>
-          </a:fontRef>
-        </p:style>
-        <p:txBody>
-          <a:bodyPr rtlCol="0" anchor="ctr"/>
-          <a:lstStyle/>
-          <a:p>
-            <a:pPr algn="ctr"/>
-          </a:p>
-        </p:txBody>
-      </p:sp>
-      <p:sp>
-        <p:nvSpPr>
-          <p:cNvPr id="4" name="TextBox 3"/>
-          <p:cNvSpPr txBox="1"/>
-          <p:nvPr/>
-        </p:nvSpPr>
-        <p:spPr>
-          <a:xfrm>
-            <a:off x="457200" y="109728"/>
-            <a:ext cx="10972800" cy="256032"/>
-          </a:xfrm>
-          <a:prstGeom prst="rect">
-            <a:avLst/>
-          </a:prstGeom>
-          <a:noFill/>
-        </p:spPr>
-        <p:txBody>
-          <a:bodyPr wrap="square" anchor="t">
-            <a:spAutoFit/>
-          </a:bodyPr>
-          <a:lstStyle/>
-          <a:p>
-            <a:pPr algn="l">
-              <a:spcAft>
-                <a:spcPts val="0"/>
-              </a:spcAft>
-            </a:pPr>
-            <a:r>
-              <a:rPr sz="1100" b="1" i="0">
-                <a:solidFill>
-                  <a:srgbClr val="C45C26"/>
-                </a:solidFill>
-                <a:latin typeface="Calibri"/>
-              </a:rPr>
-              <a:t>DEEP TECHNOLOGY</a:t>
-            </a:r>
-          </a:p>
-        </p:txBody>
-      </p:sp>
-      <p:sp>
-        <p:nvSpPr>
-          <p:cNvPr id="5" name="TextBox 4"/>
-          <p:cNvSpPr txBox="1"/>
-          <p:nvPr/>
-        </p:nvSpPr>
-        <p:spPr>
-          <a:xfrm>
-            <a:off x="457200" y="384048"/>
-            <a:ext cx="11247120" cy="475488"/>
-          </a:xfrm>
-          <a:prstGeom prst="rect">
-            <a:avLst/>
-          </a:prstGeom>
-          <a:noFill/>
-        </p:spPr>
-        <p:txBody>
-          <a:bodyPr wrap="square" anchor="t">
-            <a:spAutoFit/>
-          </a:bodyPr>
-          <a:lstStyle/>
-          <a:p>
-            <a:pPr algn="l">
-              <a:spcAft>
-                <a:spcPts val="0"/>
-              </a:spcAft>
-            </a:pPr>
-            <a:r>
-              <a:rPr sz="2200" b="1" i="0">
-                <a:solidFill>
-                  <a:srgbClr val="0A1F2E"/>
-                </a:solidFill>
-                <a:latin typeface="Calibri"/>
-              </a:rPr>
-              <a:t>Intelligence rooted in African community care</a:t>
-            </a:r>
-          </a:p>
-        </p:txBody>
-      </p:sp>
-      <p:pic>
-        <p:nvPicPr>
-          <p:cNvPr id="6" name="Picture 5" descr="deep_tech_collage_opt.jpg"/>
-          <p:cNvPicPr>
-            <a:picLocks noChangeAspect="1"/>
-          </p:cNvPicPr>
-          <p:nvPr/>
-        </p:nvPicPr>
-        <p:blipFill>
-          <a:blip r:embed="rId2"/>
-          <a:stretch>
-            <a:fillRect/>
-          </a:stretch>
-        </p:blipFill>
-        <p:spPr>
-          <a:xfrm>
-            <a:off x="411480" y="2065630"/>
-            <a:ext cx="5120640" cy="3412540"/>
-          </a:xfrm>
-          <a:prstGeom prst="rect">
-            <a:avLst/>
-          </a:prstGeom>
-        </p:spPr>
-      </p:pic>
-      <p:sp>
-        <p:nvSpPr>
-          <p:cNvPr id="7" name="Rectangle 6"/>
-          <p:cNvSpPr/>
-          <p:nvPr/>
-        </p:nvSpPr>
-        <p:spPr>
-          <a:xfrm>
-            <a:off x="5852160" y="1197864"/>
-            <a:ext cx="5852160" cy="766572"/>
-          </a:xfrm>
-          <a:prstGeom prst="rect">
-            <a:avLst/>
-          </a:prstGeom>
-          <a:solidFill>
-            <a:srgbClr val="FFFFFF"/>
-          </a:solidFill>
-          <a:ln w="9525">
-            <a:solidFill>
-              <a:srgbClr val="D0DCDC"/>
-            </a:solidFill>
-          </a:ln>
-          <a:effectLst/>
-        </p:spPr>
-        <p:style>
-          <a:lnRef idx="1">
-            <a:schemeClr val="accent1"/>
-          </a:lnRef>
-          <a:fillRef idx="3">
-            <a:schemeClr val="accent1"/>
-          </a:fillRef>
-          <a:effectRef idx="2">
-            <a:schemeClr val="accent1"/>
-          </a:effectRef>
-          <a:fontRef idx="minor">
-            <a:schemeClr val="lt1"/>
-          </a:fontRef>
-        </p:style>
-        <p:txBody>
-          <a:bodyPr rtlCol="0" anchor="ctr"/>
-          <a:lstStyle/>
-          <a:p>
-            <a:pPr algn="ctr"/>
-          </a:p>
-        </p:txBody>
-      </p:sp>
-      <p:sp>
-        <p:nvSpPr>
-          <p:cNvPr id="8" name="TextBox 7"/>
-          <p:cNvSpPr txBox="1"/>
-          <p:nvPr/>
-        </p:nvSpPr>
-        <p:spPr>
-          <a:xfrm>
-            <a:off x="6035040" y="1252728"/>
-            <a:ext cx="5486400" cy="274320"/>
-          </a:xfrm>
-          <a:prstGeom prst="rect">
-            <a:avLst/>
-          </a:prstGeom>
-          <a:noFill/>
-        </p:spPr>
-        <p:txBody>
-          <a:bodyPr wrap="square" anchor="t">
-            <a:spAutoFit/>
-          </a:bodyPr>
-          <a:lstStyle/>
-          <a:p>
-            <a:pPr algn="l">
-              <a:spcAft>
-                <a:spcPts val="0"/>
-              </a:spcAft>
-            </a:pPr>
-            <a:r>
-              <a:rPr sz="1400" b="1" i="0">
-                <a:solidFill>
-                  <a:srgbClr val="0D6E6E"/>
-                </a:solidFill>
-                <a:latin typeface="Calibri"/>
-              </a:rPr>
-              <a:t>Artificial Intelligence</a:t>
-            </a:r>
-          </a:p>
-        </p:txBody>
-      </p:sp>
-      <p:sp>
-        <p:nvSpPr>
-          <p:cNvPr id="9" name="TextBox 8"/>
-          <p:cNvSpPr txBox="1"/>
-          <p:nvPr/>
-        </p:nvSpPr>
-        <p:spPr>
-          <a:xfrm>
-            <a:off x="6035040" y="1527048"/>
-            <a:ext cx="5486400" cy="365760"/>
-          </a:xfrm>
-          <a:prstGeom prst="rect">
-            <a:avLst/>
-          </a:prstGeom>
-          <a:noFill/>
-        </p:spPr>
-        <p:txBody>
-          <a:bodyPr wrap="square" anchor="t">
-            <a:spAutoFit/>
-          </a:bodyPr>
-          <a:lstStyle/>
-          <a:p>
-            <a:pPr algn="l">
-              <a:spcAft>
-                <a:spcPts val="0"/>
-              </a:spcAft>
-            </a:pPr>
-            <a:r>
-              <a:rPr sz="1200" b="0" i="0">
-                <a:solidFill>
-                  <a:srgbClr val="3A4A54"/>
-                </a:solidFill>
-                <a:latin typeface="Calibri"/>
-              </a:rPr>
-              <a:t>Outbreak early warning; maternal and NCD risk scoring</a:t>
-            </a:r>
-          </a:p>
-        </p:txBody>
-      </p:sp>
-      <p:sp>
-        <p:nvSpPr>
-          <p:cNvPr id="10" name="Rectangle 9"/>
-          <p:cNvSpPr/>
-          <p:nvPr/>
-        </p:nvSpPr>
-        <p:spPr>
-          <a:xfrm>
-            <a:off x="5852160" y="2074164"/>
-            <a:ext cx="5852160" cy="766572"/>
-          </a:xfrm>
-          <a:prstGeom prst="rect">
-            <a:avLst/>
-          </a:prstGeom>
-          <a:solidFill>
-            <a:srgbClr val="FFFFFF"/>
-          </a:solidFill>
-          <a:ln w="9525">
-            <a:solidFill>
-              <a:srgbClr val="D0DCDC"/>
-            </a:solidFill>
-          </a:ln>
-          <a:effectLst/>
-        </p:spPr>
-        <p:style>
-          <a:lnRef idx="1">
-            <a:schemeClr val="accent1"/>
-          </a:lnRef>
-          <a:fillRef idx="3">
-            <a:schemeClr val="accent1"/>
-          </a:fillRef>
-          <a:effectRef idx="2">
-            <a:schemeClr val="accent1"/>
-          </a:effectRef>
-          <a:fontRef idx="minor">
-            <a:schemeClr val="lt1"/>
-          </a:fontRef>
-        </p:style>
-        <p:txBody>
-          <a:bodyPr rtlCol="0" anchor="ctr"/>
-          <a:lstStyle/>
-          <a:p>
-            <a:pPr algn="ctr"/>
-          </a:p>
-        </p:txBody>
-      </p:sp>
-      <p:sp>
-        <p:nvSpPr>
-          <p:cNvPr id="11" name="TextBox 10"/>
-          <p:cNvSpPr txBox="1"/>
-          <p:nvPr/>
-        </p:nvSpPr>
-        <p:spPr>
-          <a:xfrm>
-            <a:off x="6035040" y="2129028"/>
-            <a:ext cx="5486400" cy="274320"/>
-          </a:xfrm>
-          <a:prstGeom prst="rect">
-            <a:avLst/>
-          </a:prstGeom>
-          <a:noFill/>
-        </p:spPr>
-        <p:txBody>
-          <a:bodyPr wrap="square" anchor="t">
-            <a:spAutoFit/>
-          </a:bodyPr>
-          <a:lstStyle/>
-          <a:p>
-            <a:pPr algn="l">
-              <a:spcAft>
-                <a:spcPts val="0"/>
-              </a:spcAft>
-            </a:pPr>
-            <a:r>
-              <a:rPr sz="1400" b="1" i="0">
-                <a:solidFill>
-                  <a:srgbClr val="0D6E6E"/>
-                </a:solidFill>
-                <a:latin typeface="Calibri"/>
-              </a:rPr>
-              <a:t>Machine Learning</a:t>
-            </a:r>
-          </a:p>
-        </p:txBody>
-      </p:sp>
-      <p:sp>
-        <p:nvSpPr>
-          <p:cNvPr id="12" name="TextBox 11"/>
-          <p:cNvSpPr txBox="1"/>
-          <p:nvPr/>
-        </p:nvSpPr>
-        <p:spPr>
-          <a:xfrm>
-            <a:off x="6035040" y="2403348"/>
-            <a:ext cx="5486400" cy="365760"/>
-          </a:xfrm>
-          <a:prstGeom prst="rect">
-            <a:avLst/>
-          </a:prstGeom>
-          <a:noFill/>
-        </p:spPr>
-        <p:txBody>
-          <a:bodyPr wrap="square" anchor="t">
-            <a:spAutoFit/>
-          </a:bodyPr>
-          <a:lstStyle/>
-          <a:p>
-            <a:pPr algn="l">
-              <a:spcAft>
-                <a:spcPts val="0"/>
-              </a:spcAft>
-            </a:pPr>
-            <a:r>
-              <a:rPr sz="1200" b="0" i="0">
-                <a:solidFill>
-                  <a:srgbClr val="3A4A54"/>
-                </a:solidFill>
-                <a:latin typeface="Calibri"/>
-              </a:rPr>
-              <a:t>Learn from community patterns, seasons, and outreach outcomes</a:t>
-            </a:r>
-          </a:p>
-        </p:txBody>
-      </p:sp>
-      <p:sp>
-        <p:nvSpPr>
-          <p:cNvPr id="13" name="Rectangle 12"/>
-          <p:cNvSpPr/>
-          <p:nvPr/>
-        </p:nvSpPr>
-        <p:spPr>
-          <a:xfrm>
-            <a:off x="5852160" y="2950464"/>
-            <a:ext cx="5852160" cy="766572"/>
-          </a:xfrm>
-          <a:prstGeom prst="rect">
-            <a:avLst/>
-          </a:prstGeom>
-          <a:solidFill>
-            <a:srgbClr val="FFFFFF"/>
-          </a:solidFill>
-          <a:ln w="9525">
-            <a:solidFill>
-              <a:srgbClr val="D0DCDC"/>
-            </a:solidFill>
-          </a:ln>
-          <a:effectLst/>
-        </p:spPr>
-        <p:style>
-          <a:lnRef idx="1">
-            <a:schemeClr val="accent1"/>
-          </a:lnRef>
-          <a:fillRef idx="3">
-            <a:schemeClr val="accent1"/>
-          </a:fillRef>
-          <a:effectRef idx="2">
-            <a:schemeClr val="accent1"/>
-          </a:effectRef>
-          <a:fontRef idx="minor">
-            <a:schemeClr val="lt1"/>
-          </a:fontRef>
-        </p:style>
-        <p:txBody>
-          <a:bodyPr rtlCol="0" anchor="ctr"/>
-          <a:lstStyle/>
-          <a:p>
-            <a:pPr algn="ctr"/>
-          </a:p>
-        </p:txBody>
-      </p:sp>
-      <p:sp>
-        <p:nvSpPr>
-          <p:cNvPr id="14" name="TextBox 13"/>
-          <p:cNvSpPr txBox="1"/>
-          <p:nvPr/>
-        </p:nvSpPr>
-        <p:spPr>
-          <a:xfrm>
-            <a:off x="6035040" y="3005328"/>
-            <a:ext cx="5486400" cy="274320"/>
-          </a:xfrm>
-          <a:prstGeom prst="rect">
-            <a:avLst/>
-          </a:prstGeom>
-          <a:noFill/>
-        </p:spPr>
-        <p:txBody>
-          <a:bodyPr wrap="square" anchor="t">
-            <a:spAutoFit/>
-          </a:bodyPr>
-          <a:lstStyle/>
-          <a:p>
-            <a:pPr algn="l">
-              <a:spcAft>
-                <a:spcPts val="0"/>
-              </a:spcAft>
-            </a:pPr>
-            <a:r>
-              <a:rPr sz="1400" b="1" i="0">
-                <a:solidFill>
-                  <a:srgbClr val="0D6E6E"/>
-                </a:solidFill>
-                <a:latin typeface="Calibri"/>
-              </a:rPr>
-              <a:t>GIS Mapping</a:t>
-            </a:r>
-          </a:p>
-        </p:txBody>
-      </p:sp>
-      <p:sp>
-        <p:nvSpPr>
-          <p:cNvPr id="15" name="TextBox 14"/>
-          <p:cNvSpPr txBox="1"/>
-          <p:nvPr/>
-        </p:nvSpPr>
-        <p:spPr>
-          <a:xfrm>
-            <a:off x="6035040" y="3279648"/>
-            <a:ext cx="5486400" cy="365760"/>
-          </a:xfrm>
-          <a:prstGeom prst="rect">
-            <a:avLst/>
-          </a:prstGeom>
-          <a:noFill/>
-        </p:spPr>
-        <p:txBody>
-          <a:bodyPr wrap="square" anchor="t">
-            <a:spAutoFit/>
-          </a:bodyPr>
-          <a:lstStyle/>
-          <a:p>
-            <a:pPr algn="l">
-              <a:spcAft>
-                <a:spcPts val="0"/>
-              </a:spcAft>
-            </a:pPr>
-            <a:r>
-              <a:rPr sz="1200" b="0" i="0">
-                <a:solidFill>
-                  <a:srgbClr val="3A4A54"/>
-                </a:solidFill>
-                <a:latin typeface="Calibri"/>
-              </a:rPr>
-              <a:t>Disease distribution, hotspots, and resource gaps</a:t>
-            </a:r>
-          </a:p>
-        </p:txBody>
-      </p:sp>
-      <p:sp>
-        <p:nvSpPr>
-          <p:cNvPr id="16" name="Rectangle 15"/>
-          <p:cNvSpPr/>
-          <p:nvPr/>
-        </p:nvSpPr>
-        <p:spPr>
-          <a:xfrm>
-            <a:off x="5852160" y="3826764"/>
-            <a:ext cx="5852160" cy="766572"/>
-          </a:xfrm>
-          <a:prstGeom prst="rect">
-            <a:avLst/>
-          </a:prstGeom>
-          <a:solidFill>
-            <a:srgbClr val="FFFFFF"/>
-          </a:solidFill>
-          <a:ln w="9525">
-            <a:solidFill>
-              <a:srgbClr val="D0DCDC"/>
-            </a:solidFill>
-          </a:ln>
-          <a:effectLst/>
-        </p:spPr>
-        <p:style>
-          <a:lnRef idx="1">
-            <a:schemeClr val="accent1"/>
-          </a:lnRef>
-          <a:fillRef idx="3">
-            <a:schemeClr val="accent1"/>
-          </a:fillRef>
-          <a:effectRef idx="2">
-            <a:schemeClr val="accent1"/>
-          </a:effectRef>
-          <a:fontRef idx="minor">
-            <a:schemeClr val="lt1"/>
-          </a:fontRef>
-        </p:style>
-        <p:txBody>
-          <a:bodyPr rtlCol="0" anchor="ctr"/>
-          <a:lstStyle/>
-          <a:p>
-            <a:pPr algn="ctr"/>
-          </a:p>
-        </p:txBody>
-      </p:sp>
-      <p:sp>
-        <p:nvSpPr>
-          <p:cNvPr id="17" name="TextBox 16"/>
-          <p:cNvSpPr txBox="1"/>
-          <p:nvPr/>
-        </p:nvSpPr>
-        <p:spPr>
-          <a:xfrm>
-            <a:off x="6035040" y="3881628"/>
-            <a:ext cx="5486400" cy="274320"/>
-          </a:xfrm>
-          <a:prstGeom prst="rect">
-            <a:avLst/>
-          </a:prstGeom>
-          <a:noFill/>
-        </p:spPr>
-        <p:txBody>
-          <a:bodyPr wrap="square" anchor="t">
-            <a:spAutoFit/>
-          </a:bodyPr>
-          <a:lstStyle/>
-          <a:p>
-            <a:pPr algn="l">
-              <a:spcAft>
-                <a:spcPts val="0"/>
-              </a:spcAft>
-            </a:pPr>
-            <a:r>
-              <a:rPr sz="1400" b="1" i="0">
-                <a:solidFill>
-                  <a:srgbClr val="0D6E6E"/>
-                </a:solidFill>
-                <a:latin typeface="Calibri"/>
-              </a:rPr>
-              <a:t>Mobile Data Collection</a:t>
-            </a:r>
-          </a:p>
-        </p:txBody>
-      </p:sp>
-      <p:sp>
-        <p:nvSpPr>
-          <p:cNvPr id="18" name="TextBox 17"/>
-          <p:cNvSpPr txBox="1"/>
-          <p:nvPr/>
-        </p:nvSpPr>
-        <p:spPr>
-          <a:xfrm>
-            <a:off x="6035040" y="4155948"/>
-            <a:ext cx="5486400" cy="365760"/>
-          </a:xfrm>
-          <a:prstGeom prst="rect">
-            <a:avLst/>
-          </a:prstGeom>
-          <a:noFill/>
-        </p:spPr>
-        <p:txBody>
-          <a:bodyPr wrap="square" anchor="t">
-            <a:spAutoFit/>
-          </a:bodyPr>
-          <a:lstStyle/>
-          <a:p>
-            <a:pPr algn="l">
-              <a:spcAft>
-                <a:spcPts val="0"/>
-              </a:spcAft>
-            </a:pPr>
-            <a:r>
-              <a:rPr sz="1200" b="0" i="0">
-                <a:solidFill>
-                  <a:srgbClr val="3A4A54"/>
-                </a:solidFill>
-                <a:latin typeface="Calibri"/>
-              </a:rPr>
-              <a:t>Offline-capable CHW/VHT capture at household level</a:t>
-            </a:r>
-          </a:p>
-        </p:txBody>
-      </p:sp>
-      <p:sp>
-        <p:nvSpPr>
-          <p:cNvPr id="19" name="Rectangle 18"/>
-          <p:cNvSpPr/>
-          <p:nvPr/>
-        </p:nvSpPr>
-        <p:spPr>
-          <a:xfrm>
-            <a:off x="5852160" y="4703064"/>
-            <a:ext cx="5852160" cy="766572"/>
-          </a:xfrm>
-          <a:prstGeom prst="rect">
-            <a:avLst/>
-          </a:prstGeom>
-          <a:solidFill>
-            <a:srgbClr val="FFFFFF"/>
-          </a:solidFill>
-          <a:ln w="9525">
-            <a:solidFill>
-              <a:srgbClr val="D0DCDC"/>
-            </a:solidFill>
-          </a:ln>
-          <a:effectLst/>
-        </p:spPr>
-        <p:style>
-          <a:lnRef idx="1">
-            <a:schemeClr val="accent1"/>
-          </a:lnRef>
-          <a:fillRef idx="3">
-            <a:schemeClr val="accent1"/>
-          </a:fillRef>
-          <a:effectRef idx="2">
-            <a:schemeClr val="accent1"/>
-          </a:effectRef>
-          <a:fontRef idx="minor">
-            <a:schemeClr val="lt1"/>
-          </a:fontRef>
-        </p:style>
-        <p:txBody>
-          <a:bodyPr rtlCol="0" anchor="ctr"/>
-          <a:lstStyle/>
-          <a:p>
-            <a:pPr algn="ctr"/>
-          </a:p>
-        </p:txBody>
-      </p:sp>
-      <p:sp>
-        <p:nvSpPr>
-          <p:cNvPr id="20" name="TextBox 19"/>
-          <p:cNvSpPr txBox="1"/>
-          <p:nvPr/>
-        </p:nvSpPr>
-        <p:spPr>
-          <a:xfrm>
-            <a:off x="6035040" y="4757928"/>
-            <a:ext cx="5486400" cy="274320"/>
-          </a:xfrm>
-          <a:prstGeom prst="rect">
-            <a:avLst/>
-          </a:prstGeom>
-          <a:noFill/>
-        </p:spPr>
-        <p:txBody>
-          <a:bodyPr wrap="square" anchor="t">
-            <a:spAutoFit/>
-          </a:bodyPr>
-          <a:lstStyle/>
-          <a:p>
-            <a:pPr algn="l">
-              <a:spcAft>
-                <a:spcPts val="0"/>
-              </a:spcAft>
-            </a:pPr>
-            <a:r>
-              <a:rPr sz="1400" b="1" i="0">
-                <a:solidFill>
-                  <a:srgbClr val="0D6E6E"/>
-                </a:solidFill>
-                <a:latin typeface="Calibri"/>
-              </a:rPr>
-              <a:t>Cloud Computing</a:t>
-            </a:r>
-          </a:p>
-        </p:txBody>
-      </p:sp>
-      <p:sp>
-        <p:nvSpPr>
-          <p:cNvPr id="21" name="TextBox 20"/>
-          <p:cNvSpPr txBox="1"/>
-          <p:nvPr/>
-        </p:nvSpPr>
-        <p:spPr>
-          <a:xfrm>
-            <a:off x="6035040" y="5032248"/>
-            <a:ext cx="5486400" cy="365760"/>
-          </a:xfrm>
-          <a:prstGeom prst="rect">
-            <a:avLst/>
-          </a:prstGeom>
-          <a:noFill/>
-        </p:spPr>
-        <p:txBody>
-          <a:bodyPr wrap="square" anchor="t">
-            <a:spAutoFit/>
-          </a:bodyPr>
-          <a:lstStyle/>
-          <a:p>
-            <a:pPr algn="l">
-              <a:spcAft>
-                <a:spcPts val="0"/>
-              </a:spcAft>
-            </a:pPr>
-            <a:r>
-              <a:rPr sz="1200" b="0" i="0">
-                <a:solidFill>
-                  <a:srgbClr val="3A4A54"/>
-                </a:solidFill>
-                <a:latin typeface="Calibri"/>
-              </a:rPr>
-              <a:t>Secure sync across facilities and partners</a:t>
-            </a:r>
-          </a:p>
-        </p:txBody>
-      </p:sp>
-      <p:sp>
-        <p:nvSpPr>
-          <p:cNvPr id="22" name="Rectangle 21"/>
-          <p:cNvSpPr/>
-          <p:nvPr/>
-        </p:nvSpPr>
-        <p:spPr>
-          <a:xfrm>
-            <a:off x="5852160" y="5579364"/>
-            <a:ext cx="5852160" cy="766572"/>
-          </a:xfrm>
-          <a:prstGeom prst="rect">
-            <a:avLst/>
-          </a:prstGeom>
-          <a:solidFill>
-            <a:srgbClr val="FFFFFF"/>
-          </a:solidFill>
-          <a:ln w="9525">
-            <a:solidFill>
-              <a:srgbClr val="D0DCDC"/>
-            </a:solidFill>
-          </a:ln>
-          <a:effectLst/>
-        </p:spPr>
-        <p:style>
-          <a:lnRef idx="1">
-            <a:schemeClr val="accent1"/>
-          </a:lnRef>
-          <a:fillRef idx="3">
-            <a:schemeClr val="accent1"/>
-          </a:fillRef>
-          <a:effectRef idx="2">
-            <a:schemeClr val="accent1"/>
-          </a:effectRef>
-          <a:fontRef idx="minor">
-            <a:schemeClr val="lt1"/>
-          </a:fontRef>
-        </p:style>
-        <p:txBody>
-          <a:bodyPr rtlCol="0" anchor="ctr"/>
-          <a:lstStyle/>
-          <a:p>
-            <a:pPr algn="ctr"/>
-          </a:p>
-        </p:txBody>
-      </p:sp>
-      <p:sp>
-        <p:nvSpPr>
-          <p:cNvPr id="23" name="TextBox 22"/>
-          <p:cNvSpPr txBox="1"/>
-          <p:nvPr/>
-        </p:nvSpPr>
-        <p:spPr>
-          <a:xfrm>
-            <a:off x="6035040" y="5634228"/>
-            <a:ext cx="5486400" cy="274320"/>
-          </a:xfrm>
-          <a:prstGeom prst="rect">
-            <a:avLst/>
-          </a:prstGeom>
-          <a:noFill/>
-        </p:spPr>
-        <p:txBody>
-          <a:bodyPr wrap="square" anchor="t">
-            <a:spAutoFit/>
-          </a:bodyPr>
-          <a:lstStyle/>
-          <a:p>
-            <a:pPr algn="l">
-              <a:spcAft>
-                <a:spcPts val="0"/>
-              </a:spcAft>
-            </a:pPr>
-            <a:r>
-              <a:rPr sz="1400" b="1" i="0">
-                <a:solidFill>
-                  <a:srgbClr val="0D6E6E"/>
-                </a:solidFill>
-                <a:latin typeface="Calibri"/>
-              </a:rPr>
-              <a:t>Analytics Dashboards</a:t>
-            </a:r>
-          </a:p>
-        </p:txBody>
-      </p:sp>
-      <p:sp>
-        <p:nvSpPr>
-          <p:cNvPr id="24" name="TextBox 23"/>
-          <p:cNvSpPr txBox="1"/>
-          <p:nvPr/>
-        </p:nvSpPr>
-        <p:spPr>
-          <a:xfrm>
-            <a:off x="6035040" y="5908548"/>
-            <a:ext cx="5486400" cy="365760"/>
-          </a:xfrm>
-          <a:prstGeom prst="rect">
-            <a:avLst/>
-          </a:prstGeom>
-          <a:noFill/>
-        </p:spPr>
-        <p:txBody>
-          <a:bodyPr wrap="square" anchor="t">
-            <a:spAutoFit/>
-          </a:bodyPr>
-          <a:lstStyle/>
-          <a:p>
-            <a:pPr algn="l">
-              <a:spcAft>
-                <a:spcPts val="0"/>
-              </a:spcAft>
-            </a:pPr>
-            <a:r>
-              <a:rPr sz="1200" b="0" i="0">
-                <a:solidFill>
-                  <a:srgbClr val="3A4A54"/>
-                </a:solidFill>
-                <a:latin typeface="Calibri"/>
-              </a:rPr>
-              <a:t>Real-time views for clinics, districts, and NGOs</a:t>
-            </a:r>
-          </a:p>
-        </p:txBody>
-      </p:sp>
-      <p:sp>
-        <p:nvSpPr>
-          <p:cNvPr id="25" name="Rectangle 24"/>
-          <p:cNvSpPr/>
-          <p:nvPr/>
-        </p:nvSpPr>
-        <p:spPr>
-          <a:xfrm>
-            <a:off x="0" y="6565392"/>
-            <a:ext cx="12191695" cy="292608"/>
-          </a:xfrm>
-          <a:prstGeom prst="rect">
-            <a:avLst/>
-          </a:prstGeom>
-          <a:solidFill>
-            <a:srgbClr val="0A1F2E"/>
-          </a:solidFill>
-          <a:ln>
-            <a:noFill/>
-          </a:ln>
-          <a:effectLst/>
-        </p:spPr>
-        <p:style>
-          <a:lnRef idx="1">
-            <a:schemeClr val="accent1"/>
-          </a:lnRef>
-          <a:fillRef idx="3">
-            <a:schemeClr val="accent1"/>
-          </a:fillRef>
-          <a:effectRef idx="2">
-            <a:schemeClr val="accent1"/>
-          </a:effectRef>
-          <a:fontRef idx="minor">
-            <a:schemeClr val="lt1"/>
-          </a:fontRef>
-        </p:style>
-        <p:txBody>
-          <a:bodyPr rtlCol="0" anchor="ctr"/>
-          <a:lstStyle/>
-          <a:p>
-            <a:pPr algn="ctr"/>
-          </a:p>
-        </p:txBody>
-      </p:sp>
-      <p:sp>
-        <p:nvSpPr>
-          <p:cNvPr id="26" name="TextBox 25"/>
-          <p:cNvSpPr txBox="1"/>
-          <p:nvPr/>
-        </p:nvSpPr>
-        <p:spPr>
-          <a:xfrm>
-            <a:off x="365760" y="6574536"/>
-            <a:ext cx="9144000" cy="274320"/>
-          </a:xfrm>
-          <a:prstGeom prst="rect">
-            <a:avLst/>
-          </a:prstGeom>
-          <a:noFill/>
-        </p:spPr>
-        <p:txBody>
-          <a:bodyPr wrap="square" anchor="ctr">
-            <a:spAutoFit/>
-          </a:bodyPr>
-          <a:lstStyle/>
-          <a:p>
-            <a:pPr algn="l">
-              <a:spcAft>
-                <a:spcPts val="0"/>
-              </a:spcAft>
-            </a:pPr>
-            <a:r>
-              <a:rPr sz="900" b="0" i="0">
-                <a:solidFill>
-                  <a:srgbClr val="FFFFFF"/>
-                </a:solidFill>
-                <a:latin typeface="Calibri"/>
-              </a:rPr>
-              <a:t>FairBanks FCHIP  |  World Health Summit 2026 Youth Group Opp  |  Your health, our mission.</a:t>
-            </a:r>
-          </a:p>
-        </p:txBody>
-      </p:sp>
-      <p:sp>
-        <p:nvSpPr>
-          <p:cNvPr id="27" name="TextBox 26"/>
-          <p:cNvSpPr txBox="1"/>
-          <p:nvPr/>
-        </p:nvSpPr>
-        <p:spPr>
-          <a:xfrm>
-            <a:off x="11094415" y="6574536"/>
-            <a:ext cx="731520" cy="274320"/>
-          </a:xfrm>
-          <a:prstGeom prst="rect">
-            <a:avLst/>
-          </a:prstGeom>
-          <a:noFill/>
-        </p:spPr>
-        <p:txBody>
-          <a:bodyPr wrap="square" anchor="ctr">
-            <a:spAutoFit/>
-          </a:bodyPr>
-          <a:lstStyle/>
-          <a:p>
-            <a:pPr algn="r">
-              <a:spcAft>
-                <a:spcPts val="0"/>
-              </a:spcAft>
-            </a:pPr>
-            <a:r>
-              <a:rPr sz="900" b="0" i="0">
-                <a:solidFill>
-                  <a:srgbClr val="FFFFFF"/>
-                </a:solidFill>
-                <a:latin typeface="Calibri"/>
-              </a:rPr>
-              <a:t>8</a:t>
-            </a:r>
-          </a:p>
-        </p:txBody>
-      </p:sp>
-    </p:spTree>
-  </p:cSld>
-  <p:clrMapOvr>
-    <a:masterClrMapping/>
-  </p:clrMapOvr>
-</p:sld>
-</file>
-
-<file path=ppt/slides/slide9.xml><?xml version="1.0" encoding="utf-8"?>
-<p:sld xmlns:a="http://schemas.openxmlformats.org/drawingml/2006/main" xmlns:p="http://schemas.openxmlformats.org/presentationml/2006/main" xmlns:r="http://schemas.openxmlformats.org/officeDocument/2006/relationships">
-  <p:cSld>
-    <p:spTree>
-      <p:nvGrpSpPr>
-        <p:cNvPr id="1" name=""/>
-        <p:cNvGrpSpPr/>
-        <p:nvPr/>
-      </p:nvGrpSpPr>
-      <p:grpSpPr/>
-      <p:sp>
-        <p:nvSpPr>
-          <p:cNvPr id="2" name="Rectangle 1"/>
-          <p:cNvSpPr/>
-          <p:nvPr/>
-        </p:nvSpPr>
-        <p:spPr>
-          <a:xfrm>
-            <a:off x="0" y="0"/>
-            <a:ext cx="12191695" cy="960120"/>
-          </a:xfrm>
-          <a:prstGeom prst="rect">
-            <a:avLst/>
-          </a:prstGeom>
-          <a:solidFill>
-            <a:srgbClr val="F7F5F0"/>
-          </a:solidFill>
-          <a:ln>
-            <a:noFill/>
-          </a:ln>
-          <a:effectLst/>
-        </p:spPr>
-        <p:style>
-          <a:lnRef idx="1">
-            <a:schemeClr val="accent1"/>
-          </a:lnRef>
-          <a:fillRef idx="3">
-            <a:schemeClr val="accent1"/>
-          </a:fillRef>
-          <a:effectRef idx="2">
-            <a:schemeClr val="accent1"/>
-          </a:effectRef>
-          <a:fontRef idx="minor">
-            <a:schemeClr val="lt1"/>
-          </a:fontRef>
-        </p:style>
-        <p:txBody>
-          <a:bodyPr rtlCol="0" anchor="ctr"/>
-          <a:lstStyle/>
-          <a:p>
-            <a:pPr algn="ctr"/>
-          </a:p>
-        </p:txBody>
-      </p:sp>
-      <p:sp>
-        <p:nvSpPr>
-          <p:cNvPr id="3" name="Rectangle 2"/>
-          <p:cNvSpPr/>
-          <p:nvPr/>
-        </p:nvSpPr>
-        <p:spPr>
-          <a:xfrm>
-            <a:off x="0" y="0"/>
-            <a:ext cx="164592" cy="960120"/>
-          </a:xfrm>
-          <a:prstGeom prst="rect">
-            <a:avLst/>
-          </a:prstGeom>
-          <a:solidFill>
-            <a:srgbClr val="0D6E6E"/>
-          </a:solidFill>
-          <a:ln>
-            <a:noFill/>
-          </a:ln>
-          <a:effectLst/>
-        </p:spPr>
-        <p:style>
-          <a:lnRef idx="1">
-            <a:schemeClr val="accent1"/>
-          </a:lnRef>
-          <a:fillRef idx="3">
-            <a:schemeClr val="accent1"/>
-          </a:fillRef>
-          <a:effectRef idx="2">
-            <a:schemeClr val="accent1"/>
-          </a:effectRef>
-          <a:fontRef idx="minor">
-            <a:schemeClr val="lt1"/>
-          </a:fontRef>
-        </p:style>
-        <p:txBody>
-          <a:bodyPr rtlCol="0" anchor="ctr"/>
-          <a:lstStyle/>
-          <a:p>
-            <a:pPr algn="ctr"/>
-          </a:p>
-        </p:txBody>
-      </p:sp>
-      <p:sp>
-        <p:nvSpPr>
-          <p:cNvPr id="4" name="TextBox 3"/>
-          <p:cNvSpPr txBox="1"/>
-          <p:nvPr/>
-        </p:nvSpPr>
-        <p:spPr>
-          <a:xfrm>
-            <a:off x="457200" y="109728"/>
-            <a:ext cx="10972800" cy="256032"/>
-          </a:xfrm>
-          <a:prstGeom prst="rect">
-            <a:avLst/>
-          </a:prstGeom>
-          <a:noFill/>
-        </p:spPr>
-        <p:txBody>
-          <a:bodyPr wrap="square" anchor="t">
-            <a:spAutoFit/>
-          </a:bodyPr>
-          <a:lstStyle/>
-          <a:p>
-            <a:pPr algn="l">
-              <a:spcAft>
-                <a:spcPts val="0"/>
-              </a:spcAft>
-            </a:pPr>
-            <a:r>
-              <a:rPr sz="1100" b="1" i="0">
-                <a:solidFill>
-                  <a:srgbClr val="C45C26"/>
-                </a:solidFill>
-                <a:latin typeface="Calibri"/>
-              </a:rPr>
-              <a:t>OUR MODEL</a:t>
-            </a:r>
-          </a:p>
-        </p:txBody>
-      </p:sp>
-      <p:sp>
-        <p:nvSpPr>
-          <p:cNvPr id="5" name="TextBox 4"/>
-          <p:cNvSpPr txBox="1"/>
-          <p:nvPr/>
-        </p:nvSpPr>
-        <p:spPr>
-          <a:xfrm>
-            <a:off x="457200" y="384048"/>
-            <a:ext cx="11247120" cy="475488"/>
-          </a:xfrm>
-          <a:prstGeom prst="rect">
-            <a:avLst/>
-          </a:prstGeom>
-          <a:noFill/>
-        </p:spPr>
-        <p:txBody>
-          <a:bodyPr wrap="square" anchor="t">
-            <a:spAutoFit/>
-          </a:bodyPr>
-          <a:lstStyle/>
-          <a:p>
-            <a:pPr algn="l">
-              <a:spcAft>
-                <a:spcPts val="0"/>
-              </a:spcAft>
-            </a:pPr>
-            <a:r>
-              <a:rPr sz="2200" b="1" i="0">
-                <a:solidFill>
-                  <a:srgbClr val="0A1F2E"/>
-                </a:solidFill>
-                <a:latin typeface="Calibri"/>
-              </a:rPr>
-              <a:t>Communities first — intelligence that serves care</a:t>
-            </a:r>
-          </a:p>
-        </p:txBody>
-      </p:sp>
-      <p:sp>
-        <p:nvSpPr>
-          <p:cNvPr id="6" name="TextBox 5"/>
-          <p:cNvSpPr txBox="1"/>
-          <p:nvPr/>
-        </p:nvSpPr>
-        <p:spPr>
-          <a:xfrm>
-            <a:off x="502920" y="1234440"/>
-            <a:ext cx="5760720" cy="5074920"/>
-          </a:xfrm>
-          <a:prstGeom prst="rect">
-            <a:avLst/>
-          </a:prstGeom>
-          <a:noFill/>
-        </p:spPr>
-        <p:txBody>
-          <a:bodyPr wrap="square">
-            <a:spAutoFit/>
-          </a:bodyPr>
-          <a:lstStyle/>
-          <a:p>
-            <a:pPr>
-              <a:spcAft>
-                <a:spcPts val="800"/>
-              </a:spcAft>
-            </a:pPr>
-            <a:r>
-              <a:rPr sz="1400">
-                <a:solidFill>
-                  <a:srgbClr val="1E2F38"/>
-                </a:solidFill>
-                <a:latin typeface="Calibri"/>
-              </a:rPr>
-              <a:t>•  Community members identify needs and own solutions</a:t>
-            </a:r>
-          </a:p>
-          <a:p>
-            <a:pPr>
-              <a:spcAft>
-                <a:spcPts val="800"/>
-              </a:spcAft>
-            </a:pPr>
-            <a:r>
-              <a:rPr sz="1400">
-                <a:solidFill>
-                  <a:srgbClr val="1E2F38"/>
-                </a:solidFill>
-                <a:latin typeface="Calibri"/>
-              </a:rPr>
-              <a:t>•  CHWs / VHTs bridge homes to clinics</a:t>
-            </a:r>
-          </a:p>
-          <a:p>
-            <a:pPr>
-              <a:spcAft>
-                <a:spcPts val="800"/>
-              </a:spcAft>
-            </a:pPr>
-            <a:r>
-              <a:rPr sz="1400">
-                <a:solidFill>
-                  <a:srgbClr val="1E2F38"/>
-                </a:solidFill>
-                <a:latin typeface="Calibri"/>
-              </a:rPr>
-              <a:t>•  FairBanks Community Reach programmes deliver outreach</a:t>
-            </a:r>
-          </a:p>
-          <a:p>
-            <a:pPr>
-              <a:spcAft>
-                <a:spcPts val="800"/>
-              </a:spcAft>
-            </a:pPr>
-            <a:r>
-              <a:rPr sz="1400">
-                <a:solidFill>
-                  <a:srgbClr val="1E2F38"/>
-                </a:solidFill>
-                <a:latin typeface="Calibri"/>
-              </a:rPr>
-              <a:t>•  FairBanks Medical Centre provides clinical care</a:t>
-            </a:r>
-          </a:p>
-          <a:p>
-            <a:pPr>
-              <a:spcAft>
-                <a:spcPts val="800"/>
-              </a:spcAft>
-            </a:pPr>
-            <a:r>
-              <a:rPr sz="1400">
-                <a:solidFill>
-                  <a:srgbClr val="1E2F38"/>
-                </a:solidFill>
-                <a:latin typeface="Calibri"/>
-              </a:rPr>
-              <a:t>•  Research, partnerships, and skills strengthen the system</a:t>
-            </a:r>
-          </a:p>
-          <a:p>
-            <a:pPr>
-              <a:spcAft>
-                <a:spcPts val="800"/>
-              </a:spcAft>
-            </a:pPr>
-            <a:r>
-              <a:rPr sz="1400">
-                <a:solidFill>
-                  <a:srgbClr val="1E2F38"/>
-                </a:solidFill>
-                <a:latin typeface="Calibri"/>
-              </a:rPr>
-              <a:t>•  Livelihoods and empowerment make health gains last</a:t>
-            </a:r>
-          </a:p>
-        </p:txBody>
-      </p:sp>
-      <p:pic>
-        <p:nvPicPr>
-          <p:cNvPr id="7" name="Picture 6" descr="gis_hotspots_opt.jpg"/>
-          <p:cNvPicPr>
-            <a:picLocks noChangeAspect="1"/>
-          </p:cNvPicPr>
-          <p:nvPr/>
-        </p:nvPicPr>
-        <p:blipFill>
-          <a:blip r:embed="rId2"/>
-          <a:stretch>
-            <a:fillRect/>
-          </a:stretch>
-        </p:blipFill>
-        <p:spPr>
-          <a:xfrm>
-            <a:off x="6492240" y="2035160"/>
-            <a:ext cx="5212080" cy="3473479"/>
-          </a:xfrm>
-          <a:prstGeom prst="rect">
-            <a:avLst/>
-          </a:prstGeom>
-        </p:spPr>
-      </p:pic>
-      <p:sp>
-        <p:nvSpPr>
-          <p:cNvPr id="8" name="Rectangle 7"/>
-          <p:cNvSpPr/>
-          <p:nvPr/>
-        </p:nvSpPr>
-        <p:spPr>
-          <a:xfrm>
-            <a:off x="0" y="6565392"/>
-            <a:ext cx="12191695" cy="292608"/>
-          </a:xfrm>
-          <a:prstGeom prst="rect">
-            <a:avLst/>
-          </a:prstGeom>
-          <a:solidFill>
-            <a:srgbClr val="0A1F2E"/>
-          </a:solidFill>
-          <a:ln>
-            <a:noFill/>
-          </a:ln>
-          <a:effectLst/>
-        </p:spPr>
-        <p:style>
-          <a:lnRef idx="1">
-            <a:schemeClr val="accent1"/>
-          </a:lnRef>
-          <a:fillRef idx="3">
-            <a:schemeClr val="accent1"/>
-          </a:fillRef>
-          <a:effectRef idx="2">
-            <a:schemeClr val="accent1"/>
-          </a:effectRef>
-          <a:fontRef idx="minor">
-            <a:schemeClr val="lt1"/>
-          </a:fontRef>
-        </p:style>
-        <p:txBody>
-          <a:bodyPr rtlCol="0" anchor="ctr"/>
-          <a:lstStyle/>
-          <a:p>
-            <a:pPr algn="ctr"/>
-          </a:p>
-        </p:txBody>
-      </p:sp>
-      <p:sp>
-        <p:nvSpPr>
-          <p:cNvPr id="9" name="TextBox 8"/>
-          <p:cNvSpPr txBox="1"/>
-          <p:nvPr/>
-        </p:nvSpPr>
-        <p:spPr>
-          <a:xfrm>
-            <a:off x="365760" y="6574536"/>
-            <a:ext cx="9144000" cy="274320"/>
-          </a:xfrm>
-          <a:prstGeom prst="rect">
-            <a:avLst/>
-          </a:prstGeom>
-          <a:noFill/>
-        </p:spPr>
-        <p:txBody>
-          <a:bodyPr wrap="square" anchor="ctr">
-            <a:spAutoFit/>
-          </a:bodyPr>
-          <a:lstStyle/>
-          <a:p>
-            <a:pPr algn="l">
-              <a:spcAft>
-                <a:spcPts val="0"/>
-              </a:spcAft>
-            </a:pPr>
-            <a:r>
-              <a:rPr sz="900" b="0" i="0">
-                <a:solidFill>
-                  <a:srgbClr val="FFFFFF"/>
-                </a:solidFill>
-                <a:latin typeface="Calibri"/>
-              </a:rPr>
-              <a:t>FairBanks FCHIP  |  World Health Summit 2026 Youth Group Opp  |  Your health, our mission.</a:t>
-            </a:r>
-          </a:p>
-        </p:txBody>
-      </p:sp>
-      <p:sp>
-        <p:nvSpPr>
-          <p:cNvPr id="10" name="TextBox 9"/>
-          <p:cNvSpPr txBox="1"/>
-          <p:nvPr/>
-        </p:nvSpPr>
-        <p:spPr>
-          <a:xfrm>
-            <a:off x="11094415" y="6574536"/>
-            <a:ext cx="731520" cy="274320"/>
-          </a:xfrm>
-          <a:prstGeom prst="rect">
-            <a:avLst/>
-          </a:prstGeom>
-          <a:noFill/>
-        </p:spPr>
-        <p:txBody>
-          <a:bodyPr wrap="square" anchor="ctr">
-            <a:spAutoFit/>
-          </a:bodyPr>
-          <a:lstStyle/>
-          <a:p>
-            <a:pPr algn="r">
-              <a:spcAft>
-                <a:spcPts val="0"/>
-              </a:spcAft>
-            </a:pPr>
-            <a:r>
-              <a:rPr sz="900" b="0" i="0">
-                <a:solidFill>
-                  <a:srgbClr val="FFFFFF"/>
-                </a:solidFill>
-                <a:latin typeface="Calibri"/>
-              </a:rPr>
-              <a:t>9</a:t>
             </a:r>
           </a:p>
         </p:txBody>

--- a/applications/whs/documents/whs_ppt.pptx
+++ b/applications/whs/documents/whs_ppt.pptx
@@ -3204,8 +3204,8 @@
         </p:nvSpPr>
         <p:spPr>
           <a:xfrm>
-            <a:off x="502920" y="4800600"/>
-            <a:ext cx="10972800" cy="594360"/>
+            <a:off x="502920" y="4709160"/>
+            <a:ext cx="10972800" cy="502920"/>
           </a:xfrm>
           <a:prstGeom prst="rect">
             <a:avLst/>
@@ -3220,7 +3220,7 @@
           <a:p>
             <a:pPr algn="l"/>
             <a:r>
-              <a:rPr sz="2600" b="1" i="0">
+              <a:rPr sz="2400" b="1" i="0">
                 <a:solidFill>
                   <a:srgbClr val="FFFFFF"/>
                 </a:solidFill>
@@ -3239,8 +3239,8 @@
         </p:nvSpPr>
         <p:spPr>
           <a:xfrm>
-            <a:off x="502920" y="5532120"/>
-            <a:ext cx="10972800" cy="365760"/>
+            <a:off x="502920" y="5212080"/>
+            <a:ext cx="10972800" cy="274320"/>
           </a:xfrm>
           <a:prstGeom prst="rect">
             <a:avLst/>
@@ -3255,12 +3255,47 @@
           <a:p>
             <a:pPr algn="l"/>
             <a:r>
-              <a:rPr sz="1400" b="0" i="1">
+              <a:rPr sz="1300" b="1" i="1">
                 <a:solidFill>
                   <a:srgbClr val="F2C79B"/>
                 </a:solidFill>
                 <a:latin typeface="Calibri"/>
               </a:rPr>
+              <a:t>FairBanks Community Health Intelligence Platform (FCHIP)</a:t>
+            </a:r>
+          </a:p>
+        </p:txBody>
+      </p:sp>
+      <p:sp>
+        <p:nvSpPr>
+          <p:cNvPr id="7" name="TextBox 6"/>
+          <p:cNvSpPr txBox="1"/>
+          <p:nvPr/>
+        </p:nvSpPr>
+        <p:spPr>
+          <a:xfrm>
+            <a:off x="502920" y="5577840"/>
+            <a:ext cx="10972800" cy="320040"/>
+          </a:xfrm>
+          <a:prstGeom prst="rect">
+            <a:avLst/>
+          </a:prstGeom>
+          <a:noFill/>
+        </p:spPr>
+        <p:txBody>
+          <a:bodyPr wrap="square">
+            <a:spAutoFit/>
+          </a:bodyPr>
+          <a:lstStyle/>
+          <a:p>
+            <a:pPr algn="l"/>
+            <a:r>
+              <a:rPr sz="1200" b="0" i="1">
+                <a:solidFill>
+                  <a:srgbClr val="D0E8E8"/>
+                </a:solidFill>
+                <a:latin typeface="Calibri"/>
+              </a:rPr>
               <a:t>Learning global prevention practice to strengthen community health at home</a:t>
             </a:r>
           </a:p>
@@ -3268,7 +3303,7 @@
       </p:sp>
       <p:sp>
         <p:nvSpPr>
-          <p:cNvPr id="7" name="TextBox 6"/>
+          <p:cNvPr id="8" name="TextBox 7"/>
           <p:cNvSpPr txBox="1"/>
           <p:nvPr/>
         </p:nvSpPr>

--- a/applications/whs/documents/whs_ppt.pptx
+++ b/applications/whs/documents/whs_ppt.pptx
@@ -3183,7 +3183,17 @@
           </a:bodyPr>
           <a:lstStyle/>
           <a:p>
-            <a:pPr algn="l"/>
+            <a:pPr algn="l">
+              <a:lnSpc>
+                <a:spcPct val="115000"/>
+              </a:lnSpc>
+              <a:spcBef>
+                <a:spcPts val="0"/>
+              </a:spcBef>
+              <a:spcAft>
+                <a:spcPts val="200"/>
+              </a:spcAft>
+            </a:pPr>
             <a:r>
               <a:rPr sz="1200" b="1" i="0">
                 <a:solidFill>
@@ -3218,7 +3228,17 @@
           </a:bodyPr>
           <a:lstStyle/>
           <a:p>
-            <a:pPr algn="l"/>
+            <a:pPr algn="l">
+              <a:lnSpc>
+                <a:spcPct val="115000"/>
+              </a:lnSpc>
+              <a:spcBef>
+                <a:spcPts val="0"/>
+              </a:spcBef>
+              <a:spcAft>
+                <a:spcPts val="200"/>
+              </a:spcAft>
+            </a:pPr>
             <a:r>
               <a:rPr sz="2400" b="1" i="0">
                 <a:solidFill>
@@ -3253,7 +3273,17 @@
           </a:bodyPr>
           <a:lstStyle/>
           <a:p>
-            <a:pPr algn="l"/>
+            <a:pPr algn="l">
+              <a:lnSpc>
+                <a:spcPct val="115000"/>
+              </a:lnSpc>
+              <a:spcBef>
+                <a:spcPts val="0"/>
+              </a:spcBef>
+              <a:spcAft>
+                <a:spcPts val="200"/>
+              </a:spcAft>
+            </a:pPr>
             <a:r>
               <a:rPr sz="1300" b="1" i="1">
                 <a:solidFill>
@@ -3288,7 +3318,17 @@
           </a:bodyPr>
           <a:lstStyle/>
           <a:p>
-            <a:pPr algn="l"/>
+            <a:pPr algn="l">
+              <a:lnSpc>
+                <a:spcPct val="115000"/>
+              </a:lnSpc>
+              <a:spcBef>
+                <a:spcPts val="0"/>
+              </a:spcBef>
+              <a:spcAft>
+                <a:spcPts val="200"/>
+              </a:spcAft>
+            </a:pPr>
             <a:r>
               <a:rPr sz="1200" b="0" i="1">
                 <a:solidFill>
@@ -3323,7 +3363,17 @@
           </a:bodyPr>
           <a:lstStyle/>
           <a:p>
-            <a:pPr algn="l"/>
+            <a:pPr algn="l">
+              <a:lnSpc>
+                <a:spcPct val="115000"/>
+              </a:lnSpc>
+              <a:spcBef>
+                <a:spcPts val="0"/>
+              </a:spcBef>
+              <a:spcAft>
+                <a:spcPts val="200"/>
+              </a:spcAft>
+            </a:pPr>
             <a:r>
               <a:rPr sz="1300" b="1" i="0">
                 <a:solidFill>
@@ -3462,7 +3512,17 @@
           </a:bodyPr>
           <a:lstStyle/>
           <a:p>
-            <a:pPr algn="l"/>
+            <a:pPr algn="l">
+              <a:lnSpc>
+                <a:spcPct val="115000"/>
+              </a:lnSpc>
+              <a:spcBef>
+                <a:spcPts val="0"/>
+              </a:spcBef>
+              <a:spcAft>
+                <a:spcPts val="200"/>
+              </a:spcAft>
+            </a:pPr>
             <a:r>
               <a:rPr sz="2400" b="1" i="0">
                 <a:solidFill>
@@ -3521,9 +3581,19 @@
           </a:bodyPr>
           <a:lstStyle/>
           <a:p>
-            <a:pPr algn="l"/>
-            <a:r>
-              <a:rPr sz="1500" b="0" i="0">
+            <a:pPr algn="l">
+              <a:lnSpc>
+                <a:spcPct val="128000"/>
+              </a:lnSpc>
+              <a:spcBef>
+                <a:spcPts val="0"/>
+              </a:spcBef>
+              <a:spcAft>
+                <a:spcPts val="200"/>
+              </a:spcAft>
+            </a:pPr>
+            <a:r>
+              <a:rPr sz="2600" b="0" i="0">
                 <a:solidFill>
                   <a:srgbClr val="1E2F38"/>
                 </a:solidFill>
@@ -3599,7 +3669,17 @@
           </a:bodyPr>
           <a:lstStyle/>
           <a:p>
-            <a:pPr algn="l"/>
+            <a:pPr algn="l">
+              <a:lnSpc>
+                <a:spcPct val="115000"/>
+              </a:lnSpc>
+              <a:spcBef>
+                <a:spcPts val="0"/>
+              </a:spcBef>
+              <a:spcAft>
+                <a:spcPts val="200"/>
+              </a:spcAft>
+            </a:pPr>
             <a:r>
               <a:rPr sz="900" b="0" i="0">
                 <a:solidFill>
@@ -3634,7 +3714,17 @@
           </a:bodyPr>
           <a:lstStyle/>
           <a:p>
-            <a:pPr algn="r"/>
+            <a:pPr algn="r">
+              <a:lnSpc>
+                <a:spcPct val="115000"/>
+              </a:lnSpc>
+              <a:spcBef>
+                <a:spcPts val="0"/>
+              </a:spcBef>
+              <a:spcAft>
+                <a:spcPts val="200"/>
+              </a:spcAft>
+            </a:pPr>
             <a:r>
               <a:rPr sz="900" b="0" i="0">
                 <a:solidFill>
@@ -3773,7 +3863,17 @@
           </a:bodyPr>
           <a:lstStyle/>
           <a:p>
-            <a:pPr algn="l"/>
+            <a:pPr algn="l">
+              <a:lnSpc>
+                <a:spcPct val="115000"/>
+              </a:lnSpc>
+              <a:spcBef>
+                <a:spcPts val="0"/>
+              </a:spcBef>
+              <a:spcAft>
+                <a:spcPts val="200"/>
+              </a:spcAft>
+            </a:pPr>
             <a:r>
               <a:rPr sz="2400" b="1" i="0">
                 <a:solidFill>
@@ -3832,9 +3932,19 @@
           </a:bodyPr>
           <a:lstStyle/>
           <a:p>
-            <a:pPr algn="l"/>
-            <a:r>
-              <a:rPr sz="1500" b="0" i="0">
+            <a:pPr algn="l">
+              <a:lnSpc>
+                <a:spcPct val="128000"/>
+              </a:lnSpc>
+              <a:spcBef>
+                <a:spcPts val="0"/>
+              </a:spcBef>
+              <a:spcAft>
+                <a:spcPts val="200"/>
+              </a:spcAft>
+            </a:pPr>
+            <a:r>
+              <a:rPr sz="2600" b="0" i="0">
                 <a:solidFill>
                   <a:srgbClr val="1E2F38"/>
                 </a:solidFill>
@@ -3910,7 +4020,17 @@
           </a:bodyPr>
           <a:lstStyle/>
           <a:p>
-            <a:pPr algn="l"/>
+            <a:pPr algn="l">
+              <a:lnSpc>
+                <a:spcPct val="115000"/>
+              </a:lnSpc>
+              <a:spcBef>
+                <a:spcPts val="0"/>
+              </a:spcBef>
+              <a:spcAft>
+                <a:spcPts val="200"/>
+              </a:spcAft>
+            </a:pPr>
             <a:r>
               <a:rPr sz="900" b="0" i="0">
                 <a:solidFill>
@@ -3945,7 +4065,17 @@
           </a:bodyPr>
           <a:lstStyle/>
           <a:p>
-            <a:pPr algn="r"/>
+            <a:pPr algn="r">
+              <a:lnSpc>
+                <a:spcPct val="115000"/>
+              </a:lnSpc>
+              <a:spcBef>
+                <a:spcPts val="0"/>
+              </a:spcBef>
+              <a:spcAft>
+                <a:spcPts val="200"/>
+              </a:spcAft>
+            </a:pPr>
             <a:r>
               <a:rPr sz="900" b="0" i="0">
                 <a:solidFill>
@@ -4084,7 +4214,17 @@
           </a:bodyPr>
           <a:lstStyle/>
           <a:p>
-            <a:pPr algn="l"/>
+            <a:pPr algn="l">
+              <a:lnSpc>
+                <a:spcPct val="115000"/>
+              </a:lnSpc>
+              <a:spcBef>
+                <a:spcPts val="0"/>
+              </a:spcBef>
+              <a:spcAft>
+                <a:spcPts val="200"/>
+              </a:spcAft>
+            </a:pPr>
             <a:r>
               <a:rPr sz="2400" b="1" i="0">
                 <a:solidFill>
@@ -4143,9 +4283,19 @@
           </a:bodyPr>
           <a:lstStyle/>
           <a:p>
-            <a:pPr algn="l"/>
-            <a:r>
-              <a:rPr sz="1500" b="0" i="0">
+            <a:pPr algn="l">
+              <a:lnSpc>
+                <a:spcPct val="128000"/>
+              </a:lnSpc>
+              <a:spcBef>
+                <a:spcPts val="0"/>
+              </a:spcBef>
+              <a:spcAft>
+                <a:spcPts val="1400"/>
+              </a:spcAft>
+            </a:pPr>
+            <a:r>
+              <a:rPr sz="2600" b="0" i="0">
                 <a:solidFill>
                   <a:srgbClr val="1E2F38"/>
                 </a:solidFill>
@@ -4155,9 +4305,19 @@
             </a:r>
           </a:p>
           <a:p>
-            <a:pPr algn="l"/>
-            <a:r>
-              <a:rPr sz="1500" b="0" i="0">
+            <a:pPr algn="l">
+              <a:lnSpc>
+                <a:spcPct val="128000"/>
+              </a:lnSpc>
+              <a:spcBef>
+                <a:spcPts val="0"/>
+              </a:spcBef>
+              <a:spcAft>
+                <a:spcPts val="1400"/>
+              </a:spcAft>
+            </a:pPr>
+            <a:r>
+              <a:rPr sz="2600" b="0" i="0">
                 <a:solidFill>
                   <a:srgbClr val="1E2F38"/>
                 </a:solidFill>
@@ -4167,9 +4327,19 @@
             </a:r>
           </a:p>
           <a:p>
-            <a:pPr algn="l"/>
-            <a:r>
-              <a:rPr sz="1500" b="0" i="0">
+            <a:pPr algn="l">
+              <a:lnSpc>
+                <a:spcPct val="128000"/>
+              </a:lnSpc>
+              <a:spcBef>
+                <a:spcPts val="0"/>
+              </a:spcBef>
+              <a:spcAft>
+                <a:spcPts val="1400"/>
+              </a:spcAft>
+            </a:pPr>
+            <a:r>
+              <a:rPr sz="2600" b="0" i="0">
                 <a:solidFill>
                   <a:srgbClr val="1E2F38"/>
                 </a:solidFill>
@@ -4179,9 +4349,19 @@
             </a:r>
           </a:p>
           <a:p>
-            <a:pPr algn="l"/>
-            <a:r>
-              <a:rPr sz="1500" b="0" i="0">
+            <a:pPr algn="l">
+              <a:lnSpc>
+                <a:spcPct val="128000"/>
+              </a:lnSpc>
+              <a:spcBef>
+                <a:spcPts val="0"/>
+              </a:spcBef>
+              <a:spcAft>
+                <a:spcPts val="200"/>
+              </a:spcAft>
+            </a:pPr>
+            <a:r>
+              <a:rPr sz="2600" b="0" i="0">
                 <a:solidFill>
                   <a:srgbClr val="1E2F38"/>
                 </a:solidFill>
@@ -4257,7 +4437,17 @@
           </a:bodyPr>
           <a:lstStyle/>
           <a:p>
-            <a:pPr algn="l"/>
+            <a:pPr algn="l">
+              <a:lnSpc>
+                <a:spcPct val="115000"/>
+              </a:lnSpc>
+              <a:spcBef>
+                <a:spcPts val="0"/>
+              </a:spcBef>
+              <a:spcAft>
+                <a:spcPts val="200"/>
+              </a:spcAft>
+            </a:pPr>
             <a:r>
               <a:rPr sz="900" b="0" i="0">
                 <a:solidFill>
@@ -4292,7 +4482,17 @@
           </a:bodyPr>
           <a:lstStyle/>
           <a:p>
-            <a:pPr algn="r"/>
+            <a:pPr algn="r">
+              <a:lnSpc>
+                <a:spcPct val="115000"/>
+              </a:lnSpc>
+              <a:spcBef>
+                <a:spcPts val="0"/>
+              </a:spcBef>
+              <a:spcAft>
+                <a:spcPts val="200"/>
+              </a:spcAft>
+            </a:pPr>
             <a:r>
               <a:rPr sz="900" b="0" i="0">
                 <a:solidFill>
@@ -4431,7 +4631,17 @@
           </a:bodyPr>
           <a:lstStyle/>
           <a:p>
-            <a:pPr algn="l"/>
+            <a:pPr algn="l">
+              <a:lnSpc>
+                <a:spcPct val="115000"/>
+              </a:lnSpc>
+              <a:spcBef>
+                <a:spcPts val="0"/>
+              </a:spcBef>
+              <a:spcAft>
+                <a:spcPts val="200"/>
+              </a:spcAft>
+            </a:pPr>
             <a:r>
               <a:rPr sz="2400" b="1" i="0">
                 <a:solidFill>
@@ -4490,9 +4700,19 @@
           </a:bodyPr>
           <a:lstStyle/>
           <a:p>
-            <a:pPr algn="l"/>
-            <a:r>
-              <a:rPr sz="1500" b="0" i="0">
+            <a:pPr algn="l">
+              <a:lnSpc>
+                <a:spcPct val="128000"/>
+              </a:lnSpc>
+              <a:spcBef>
+                <a:spcPts val="0"/>
+              </a:spcBef>
+              <a:spcAft>
+                <a:spcPts val="200"/>
+              </a:spcAft>
+            </a:pPr>
+            <a:r>
+              <a:rPr sz="2600" b="0" i="0">
                 <a:solidFill>
                   <a:srgbClr val="1E2F38"/>
                 </a:solidFill>
@@ -4568,7 +4788,17 @@
           </a:bodyPr>
           <a:lstStyle/>
           <a:p>
-            <a:pPr algn="l"/>
+            <a:pPr algn="l">
+              <a:lnSpc>
+                <a:spcPct val="115000"/>
+              </a:lnSpc>
+              <a:spcBef>
+                <a:spcPts val="0"/>
+              </a:spcBef>
+              <a:spcAft>
+                <a:spcPts val="200"/>
+              </a:spcAft>
+            </a:pPr>
             <a:r>
               <a:rPr sz="900" b="0" i="0">
                 <a:solidFill>
@@ -4603,7 +4833,17 @@
           </a:bodyPr>
           <a:lstStyle/>
           <a:p>
-            <a:pPr algn="r"/>
+            <a:pPr algn="r">
+              <a:lnSpc>
+                <a:spcPct val="115000"/>
+              </a:lnSpc>
+              <a:spcBef>
+                <a:spcPts val="0"/>
+              </a:spcBef>
+              <a:spcAft>
+                <a:spcPts val="200"/>
+              </a:spcAft>
+            </a:pPr>
             <a:r>
               <a:rPr sz="900" b="0" i="0">
                 <a:solidFill>
@@ -4742,7 +4982,17 @@
           </a:bodyPr>
           <a:lstStyle/>
           <a:p>
-            <a:pPr algn="l"/>
+            <a:pPr algn="l">
+              <a:lnSpc>
+                <a:spcPct val="115000"/>
+              </a:lnSpc>
+              <a:spcBef>
+                <a:spcPts val="0"/>
+              </a:spcBef>
+              <a:spcAft>
+                <a:spcPts val="200"/>
+              </a:spcAft>
+            </a:pPr>
             <a:r>
               <a:rPr sz="2400" b="1" i="0">
                 <a:solidFill>
@@ -4801,9 +5051,19 @@
           </a:bodyPr>
           <a:lstStyle/>
           <a:p>
-            <a:pPr algn="l"/>
-            <a:r>
-              <a:rPr sz="1500" b="0" i="0">
+            <a:pPr algn="l">
+              <a:lnSpc>
+                <a:spcPct val="128000"/>
+              </a:lnSpc>
+              <a:spcBef>
+                <a:spcPts val="0"/>
+              </a:spcBef>
+              <a:spcAft>
+                <a:spcPts val="1400"/>
+              </a:spcAft>
+            </a:pPr>
+            <a:r>
+              <a:rPr sz="2600" b="0" i="0">
                 <a:solidFill>
                   <a:srgbClr val="1E2F38"/>
                 </a:solidFill>
@@ -4813,21 +5073,19 @@
             </a:r>
           </a:p>
           <a:p>
-            <a:pPr algn="l"/>
-            <a:r>
-              <a:rPr sz="1500" b="0" i="0">
-                <a:solidFill>
-                  <a:srgbClr val="1E2F38"/>
-                </a:solidFill>
-                <a:latin typeface="Calibri"/>
-              </a:rPr>
-              <a:t/>
-            </a:r>
-          </a:p>
-          <a:p>
-            <a:pPr algn="l"/>
-            <a:r>
-              <a:rPr sz="1500" b="0" i="0">
+            <a:pPr algn="l">
+              <a:lnSpc>
+                <a:spcPct val="128000"/>
+              </a:lnSpc>
+              <a:spcBef>
+                <a:spcPts val="0"/>
+              </a:spcBef>
+              <a:spcAft>
+                <a:spcPts val="200"/>
+              </a:spcAft>
+            </a:pPr>
+            <a:r>
+              <a:rPr sz="2600" b="0" i="0">
                 <a:solidFill>
                   <a:srgbClr val="1E2F38"/>
                 </a:solidFill>
@@ -4903,7 +5161,17 @@
           </a:bodyPr>
           <a:lstStyle/>
           <a:p>
-            <a:pPr algn="l"/>
+            <a:pPr algn="l">
+              <a:lnSpc>
+                <a:spcPct val="115000"/>
+              </a:lnSpc>
+              <a:spcBef>
+                <a:spcPts val="0"/>
+              </a:spcBef>
+              <a:spcAft>
+                <a:spcPts val="200"/>
+              </a:spcAft>
+            </a:pPr>
             <a:r>
               <a:rPr sz="900" b="0" i="0">
                 <a:solidFill>
@@ -4938,7 +5206,17 @@
           </a:bodyPr>
           <a:lstStyle/>
           <a:p>
-            <a:pPr algn="r"/>
+            <a:pPr algn="r">
+              <a:lnSpc>
+                <a:spcPct val="115000"/>
+              </a:lnSpc>
+              <a:spcBef>
+                <a:spcPts val="0"/>
+              </a:spcBef>
+              <a:spcAft>
+                <a:spcPts val="200"/>
+              </a:spcAft>
+            </a:pPr>
             <a:r>
               <a:rPr sz="900" b="0" i="0">
                 <a:solidFill>
@@ -5077,7 +5355,17 @@
           </a:bodyPr>
           <a:lstStyle/>
           <a:p>
-            <a:pPr algn="l"/>
+            <a:pPr algn="l">
+              <a:lnSpc>
+                <a:spcPct val="115000"/>
+              </a:lnSpc>
+              <a:spcBef>
+                <a:spcPts val="0"/>
+              </a:spcBef>
+              <a:spcAft>
+                <a:spcPts val="200"/>
+              </a:spcAft>
+            </a:pPr>
             <a:r>
               <a:rPr sz="2400" b="1" i="0">
                 <a:solidFill>
@@ -5136,9 +5424,19 @@
           </a:bodyPr>
           <a:lstStyle/>
           <a:p>
-            <a:pPr algn="l"/>
-            <a:r>
-              <a:rPr sz="1500" b="0" i="0">
+            <a:pPr algn="l">
+              <a:lnSpc>
+                <a:spcPct val="128000"/>
+              </a:lnSpc>
+              <a:spcBef>
+                <a:spcPts val="0"/>
+              </a:spcBef>
+              <a:spcAft>
+                <a:spcPts val="200"/>
+              </a:spcAft>
+            </a:pPr>
+            <a:r>
+              <a:rPr sz="2600" b="0" i="0">
                 <a:solidFill>
                   <a:srgbClr val="1E2F38"/>
                 </a:solidFill>
@@ -5214,7 +5512,17 @@
           </a:bodyPr>
           <a:lstStyle/>
           <a:p>
-            <a:pPr algn="l"/>
+            <a:pPr algn="l">
+              <a:lnSpc>
+                <a:spcPct val="115000"/>
+              </a:lnSpc>
+              <a:spcBef>
+                <a:spcPts val="0"/>
+              </a:spcBef>
+              <a:spcAft>
+                <a:spcPts val="200"/>
+              </a:spcAft>
+            </a:pPr>
             <a:r>
               <a:rPr sz="900" b="0" i="0">
                 <a:solidFill>
@@ -5249,7 +5557,17 @@
           </a:bodyPr>
           <a:lstStyle/>
           <a:p>
-            <a:pPr algn="r"/>
+            <a:pPr algn="r">
+              <a:lnSpc>
+                <a:spcPct val="115000"/>
+              </a:lnSpc>
+              <a:spcBef>
+                <a:spcPts val="0"/>
+              </a:spcBef>
+              <a:spcAft>
+                <a:spcPts val="200"/>
+              </a:spcAft>
+            </a:pPr>
             <a:r>
               <a:rPr sz="900" b="0" i="0">
                 <a:solidFill>

--- a/applications/whs/documents/whs_ppt.pptx
+++ b/applications/whs/documents/whs_ppt.pptx
@@ -3391,6 +3391,96 @@
   <p:clrMapOvr>
     <a:masterClrMapping/>
   </p:clrMapOvr>
+  <p:timing>
+    <p:tnLst>
+      <p:par>
+        <p:cTn id="1" dur="indefinite" restart="never" nodeType="tmRoot">
+          <p:childTnLst>
+            <p:seq concurrent="true" nextAc="seek">
+              <p:cTn id="2" dur="indefinite" nodeType="mainSeq">
+                <p:childTnLst>
+                  <p:par>
+                    <p:cTn id="9" fill="hold">
+                      <p:stCondLst>
+                        <p:cond delay="0"/>
+                      </p:stCondLst>
+                      <p:childTnLst>
+                        <p:par>
+                          <p:cTn id="3" presetID="10" presetClass="entr" presetSubtype="0" fill="hold" nodeType="withEffect">
+                            <p:stCondLst>
+                              <p:cond delay="0"/>
+                            </p:stCondLst>
+                            <p:childTnLst>
+                              <p:animEffect transition="in" filter="fade">
+                                <p:cBhvr>
+                                  <p:cTn id="4" dur="450"/>
+                                  <p:tgtEl>
+                                    <p:spTgt spid="2"/>
+                                  </p:tgtEl>
+                                </p:cBhvr>
+                              </p:animEffect>
+                            </p:childTnLst>
+                          </p:cTn>
+                        </p:par>
+                        <p:par>
+                          <p:cTn id="5" presetID="10" presetClass="entr" presetSubtype="0" fill="hold" nodeType="withEffect">
+                            <p:stCondLst>
+                              <p:cond delay="200"/>
+                            </p:stCondLst>
+                            <p:childTnLst>
+                              <p:animEffect transition="in" filter="fade">
+                                <p:cBhvr>
+                                  <p:cTn id="6" dur="450"/>
+                                  <p:tgtEl>
+                                    <p:spTgt spid="3"/>
+                                  </p:tgtEl>
+                                </p:cBhvr>
+                              </p:animEffect>
+                            </p:childTnLst>
+                          </p:cTn>
+                        </p:par>
+                        <p:par>
+                          <p:cTn id="7" presetID="10" presetClass="entr" presetSubtype="0" fill="hold" nodeType="withEffect">
+                            <p:stCondLst>
+                              <p:cond delay="200"/>
+                            </p:stCondLst>
+                            <p:childTnLst>
+                              <p:animEffect transition="in" filter="fade">
+                                <p:cBhvr>
+                                  <p:cTn id="8" dur="450"/>
+                                  <p:tgtEl>
+                                    <p:spTgt spid="4"/>
+                                  </p:tgtEl>
+                                </p:cBhvr>
+                              </p:animEffect>
+                            </p:childTnLst>
+                          </p:cTn>
+                        </p:par>
+                      </p:childTnLst>
+                    </p:cTn>
+                  </p:par>
+                </p:childTnLst>
+              </p:cTn>
+              <p:prevCondLst>
+                <p:cond evt="onPrev" delay="0">
+                  <p:tgtEl>
+                    <p:sldTgt/>
+                  </p:tgtEl>
+                </p:cond>
+              </p:prevCondLst>
+              <p:nextCondLst>
+                <p:cond evt="onNext" delay="0">
+                  <p:tgtEl>
+                    <p:sldTgt/>
+                  </p:tgtEl>
+                </p:cond>
+              </p:nextCondLst>
+            </p:seq>
+          </p:childTnLst>
+        </p:cTn>
+      </p:par>
+    </p:tnLst>
+  </p:timing>
 </p:sld>
 </file>
 
@@ -3742,6 +3832,96 @@
   <p:clrMapOvr>
     <a:masterClrMapping/>
   </p:clrMapOvr>
+  <p:timing>
+    <p:tnLst>
+      <p:par>
+        <p:cTn id="1" dur="indefinite" restart="never" nodeType="tmRoot">
+          <p:childTnLst>
+            <p:seq concurrent="true" nextAc="seek">
+              <p:cTn id="2" dur="indefinite" nodeType="mainSeq">
+                <p:childTnLst>
+                  <p:par>
+                    <p:cTn id="9" fill="hold">
+                      <p:stCondLst>
+                        <p:cond delay="0"/>
+                      </p:stCondLst>
+                      <p:childTnLst>
+                        <p:par>
+                          <p:cTn id="3" presetID="10" presetClass="entr" presetSubtype="0" fill="hold" nodeType="withEffect">
+                            <p:stCondLst>
+                              <p:cond delay="0"/>
+                            </p:stCondLst>
+                            <p:childTnLst>
+                              <p:animEffect transition="in" filter="fade">
+                                <p:cBhvr>
+                                  <p:cTn id="4" dur="450"/>
+                                  <p:tgtEl>
+                                    <p:spTgt spid="2"/>
+                                  </p:tgtEl>
+                                </p:cBhvr>
+                              </p:animEffect>
+                            </p:childTnLst>
+                          </p:cTn>
+                        </p:par>
+                        <p:par>
+                          <p:cTn id="5" presetID="10" presetClass="entr" presetSubtype="0" fill="hold" nodeType="withEffect">
+                            <p:stCondLst>
+                              <p:cond delay="200"/>
+                            </p:stCondLst>
+                            <p:childTnLst>
+                              <p:animEffect transition="in" filter="fade">
+                                <p:cBhvr>
+                                  <p:cTn id="6" dur="450"/>
+                                  <p:tgtEl>
+                                    <p:spTgt spid="3"/>
+                                  </p:tgtEl>
+                                </p:cBhvr>
+                              </p:animEffect>
+                            </p:childTnLst>
+                          </p:cTn>
+                        </p:par>
+                        <p:par>
+                          <p:cTn id="7" presetID="10" presetClass="entr" presetSubtype="0" fill="hold" nodeType="withEffect">
+                            <p:stCondLst>
+                              <p:cond delay="200"/>
+                            </p:stCondLst>
+                            <p:childTnLst>
+                              <p:animEffect transition="in" filter="fade">
+                                <p:cBhvr>
+                                  <p:cTn id="8" dur="450"/>
+                                  <p:tgtEl>
+                                    <p:spTgt spid="4"/>
+                                  </p:tgtEl>
+                                </p:cBhvr>
+                              </p:animEffect>
+                            </p:childTnLst>
+                          </p:cTn>
+                        </p:par>
+                      </p:childTnLst>
+                    </p:cTn>
+                  </p:par>
+                </p:childTnLst>
+              </p:cTn>
+              <p:prevCondLst>
+                <p:cond evt="onPrev" delay="0">
+                  <p:tgtEl>
+                    <p:sldTgt/>
+                  </p:tgtEl>
+                </p:cond>
+              </p:prevCondLst>
+              <p:nextCondLst>
+                <p:cond evt="onNext" delay="0">
+                  <p:tgtEl>
+                    <p:sldTgt/>
+                  </p:tgtEl>
+                </p:cond>
+              </p:nextCondLst>
+            </p:seq>
+          </p:childTnLst>
+        </p:cTn>
+      </p:par>
+    </p:tnLst>
+  </p:timing>
 </p:sld>
 </file>
 
@@ -4093,6 +4273,96 @@
   <p:clrMapOvr>
     <a:masterClrMapping/>
   </p:clrMapOvr>
+  <p:timing>
+    <p:tnLst>
+      <p:par>
+        <p:cTn id="1" dur="indefinite" restart="never" nodeType="tmRoot">
+          <p:childTnLst>
+            <p:seq concurrent="true" nextAc="seek">
+              <p:cTn id="2" dur="indefinite" nodeType="mainSeq">
+                <p:childTnLst>
+                  <p:par>
+                    <p:cTn id="9" fill="hold">
+                      <p:stCondLst>
+                        <p:cond delay="0"/>
+                      </p:stCondLst>
+                      <p:childTnLst>
+                        <p:par>
+                          <p:cTn id="3" presetID="10" presetClass="entr" presetSubtype="0" fill="hold" nodeType="withEffect">
+                            <p:stCondLst>
+                              <p:cond delay="0"/>
+                            </p:stCondLst>
+                            <p:childTnLst>
+                              <p:animEffect transition="in" filter="fade">
+                                <p:cBhvr>
+                                  <p:cTn id="4" dur="450"/>
+                                  <p:tgtEl>
+                                    <p:spTgt spid="2"/>
+                                  </p:tgtEl>
+                                </p:cBhvr>
+                              </p:animEffect>
+                            </p:childTnLst>
+                          </p:cTn>
+                        </p:par>
+                        <p:par>
+                          <p:cTn id="5" presetID="10" presetClass="entr" presetSubtype="0" fill="hold" nodeType="withEffect">
+                            <p:stCondLst>
+                              <p:cond delay="200"/>
+                            </p:stCondLst>
+                            <p:childTnLst>
+                              <p:animEffect transition="in" filter="fade">
+                                <p:cBhvr>
+                                  <p:cTn id="6" dur="450"/>
+                                  <p:tgtEl>
+                                    <p:spTgt spid="3"/>
+                                  </p:tgtEl>
+                                </p:cBhvr>
+                              </p:animEffect>
+                            </p:childTnLst>
+                          </p:cTn>
+                        </p:par>
+                        <p:par>
+                          <p:cTn id="7" presetID="10" presetClass="entr" presetSubtype="0" fill="hold" nodeType="withEffect">
+                            <p:stCondLst>
+                              <p:cond delay="200"/>
+                            </p:stCondLst>
+                            <p:childTnLst>
+                              <p:animEffect transition="in" filter="fade">
+                                <p:cBhvr>
+                                  <p:cTn id="8" dur="450"/>
+                                  <p:tgtEl>
+                                    <p:spTgt spid="4"/>
+                                  </p:tgtEl>
+                                </p:cBhvr>
+                              </p:animEffect>
+                            </p:childTnLst>
+                          </p:cTn>
+                        </p:par>
+                      </p:childTnLst>
+                    </p:cTn>
+                  </p:par>
+                </p:childTnLst>
+              </p:cTn>
+              <p:prevCondLst>
+                <p:cond evt="onPrev" delay="0">
+                  <p:tgtEl>
+                    <p:sldTgt/>
+                  </p:tgtEl>
+                </p:cond>
+              </p:prevCondLst>
+              <p:nextCondLst>
+                <p:cond evt="onNext" delay="0">
+                  <p:tgtEl>
+                    <p:sldTgt/>
+                  </p:tgtEl>
+                </p:cond>
+              </p:nextCondLst>
+            </p:seq>
+          </p:childTnLst>
+        </p:cTn>
+      </p:par>
+    </p:tnLst>
+  </p:timing>
 </p:sld>
 </file>
 
@@ -4510,6 +4780,96 @@
   <p:clrMapOvr>
     <a:masterClrMapping/>
   </p:clrMapOvr>
+  <p:timing>
+    <p:tnLst>
+      <p:par>
+        <p:cTn id="1" dur="indefinite" restart="never" nodeType="tmRoot">
+          <p:childTnLst>
+            <p:seq concurrent="true" nextAc="seek">
+              <p:cTn id="2" dur="indefinite" nodeType="mainSeq">
+                <p:childTnLst>
+                  <p:par>
+                    <p:cTn id="9" fill="hold">
+                      <p:stCondLst>
+                        <p:cond delay="0"/>
+                      </p:stCondLst>
+                      <p:childTnLst>
+                        <p:par>
+                          <p:cTn id="3" presetID="10" presetClass="entr" presetSubtype="0" fill="hold" nodeType="withEffect">
+                            <p:stCondLst>
+                              <p:cond delay="0"/>
+                            </p:stCondLst>
+                            <p:childTnLst>
+                              <p:animEffect transition="in" filter="fade">
+                                <p:cBhvr>
+                                  <p:cTn id="4" dur="450"/>
+                                  <p:tgtEl>
+                                    <p:spTgt spid="2"/>
+                                  </p:tgtEl>
+                                </p:cBhvr>
+                              </p:animEffect>
+                            </p:childTnLst>
+                          </p:cTn>
+                        </p:par>
+                        <p:par>
+                          <p:cTn id="5" presetID="10" presetClass="entr" presetSubtype="0" fill="hold" nodeType="withEffect">
+                            <p:stCondLst>
+                              <p:cond delay="200"/>
+                            </p:stCondLst>
+                            <p:childTnLst>
+                              <p:animEffect transition="in" filter="fade">
+                                <p:cBhvr>
+                                  <p:cTn id="6" dur="450"/>
+                                  <p:tgtEl>
+                                    <p:spTgt spid="3"/>
+                                  </p:tgtEl>
+                                </p:cBhvr>
+                              </p:animEffect>
+                            </p:childTnLst>
+                          </p:cTn>
+                        </p:par>
+                        <p:par>
+                          <p:cTn id="7" presetID="10" presetClass="entr" presetSubtype="0" fill="hold" nodeType="withEffect">
+                            <p:stCondLst>
+                              <p:cond delay="200"/>
+                            </p:stCondLst>
+                            <p:childTnLst>
+                              <p:animEffect transition="in" filter="fade">
+                                <p:cBhvr>
+                                  <p:cTn id="8" dur="450"/>
+                                  <p:tgtEl>
+                                    <p:spTgt spid="4"/>
+                                  </p:tgtEl>
+                                </p:cBhvr>
+                              </p:animEffect>
+                            </p:childTnLst>
+                          </p:cTn>
+                        </p:par>
+                      </p:childTnLst>
+                    </p:cTn>
+                  </p:par>
+                </p:childTnLst>
+              </p:cTn>
+              <p:prevCondLst>
+                <p:cond evt="onPrev" delay="0">
+                  <p:tgtEl>
+                    <p:sldTgt/>
+                  </p:tgtEl>
+                </p:cond>
+              </p:prevCondLst>
+              <p:nextCondLst>
+                <p:cond evt="onNext" delay="0">
+                  <p:tgtEl>
+                    <p:sldTgt/>
+                  </p:tgtEl>
+                </p:cond>
+              </p:nextCondLst>
+            </p:seq>
+          </p:childTnLst>
+        </p:cTn>
+      </p:par>
+    </p:tnLst>
+  </p:timing>
 </p:sld>
 </file>
 
@@ -4861,6 +5221,96 @@
   <p:clrMapOvr>
     <a:masterClrMapping/>
   </p:clrMapOvr>
+  <p:timing>
+    <p:tnLst>
+      <p:par>
+        <p:cTn id="1" dur="indefinite" restart="never" nodeType="tmRoot">
+          <p:childTnLst>
+            <p:seq concurrent="true" nextAc="seek">
+              <p:cTn id="2" dur="indefinite" nodeType="mainSeq">
+                <p:childTnLst>
+                  <p:par>
+                    <p:cTn id="9" fill="hold">
+                      <p:stCondLst>
+                        <p:cond delay="0"/>
+                      </p:stCondLst>
+                      <p:childTnLst>
+                        <p:par>
+                          <p:cTn id="3" presetID="10" presetClass="entr" presetSubtype="0" fill="hold" nodeType="withEffect">
+                            <p:stCondLst>
+                              <p:cond delay="0"/>
+                            </p:stCondLst>
+                            <p:childTnLst>
+                              <p:animEffect transition="in" filter="fade">
+                                <p:cBhvr>
+                                  <p:cTn id="4" dur="450"/>
+                                  <p:tgtEl>
+                                    <p:spTgt spid="2"/>
+                                  </p:tgtEl>
+                                </p:cBhvr>
+                              </p:animEffect>
+                            </p:childTnLst>
+                          </p:cTn>
+                        </p:par>
+                        <p:par>
+                          <p:cTn id="5" presetID="10" presetClass="entr" presetSubtype="0" fill="hold" nodeType="withEffect">
+                            <p:stCondLst>
+                              <p:cond delay="200"/>
+                            </p:stCondLst>
+                            <p:childTnLst>
+                              <p:animEffect transition="in" filter="fade">
+                                <p:cBhvr>
+                                  <p:cTn id="6" dur="450"/>
+                                  <p:tgtEl>
+                                    <p:spTgt spid="3"/>
+                                  </p:tgtEl>
+                                </p:cBhvr>
+                              </p:animEffect>
+                            </p:childTnLst>
+                          </p:cTn>
+                        </p:par>
+                        <p:par>
+                          <p:cTn id="7" presetID="10" presetClass="entr" presetSubtype="0" fill="hold" nodeType="withEffect">
+                            <p:stCondLst>
+                              <p:cond delay="200"/>
+                            </p:stCondLst>
+                            <p:childTnLst>
+                              <p:animEffect transition="in" filter="fade">
+                                <p:cBhvr>
+                                  <p:cTn id="8" dur="450"/>
+                                  <p:tgtEl>
+                                    <p:spTgt spid="4"/>
+                                  </p:tgtEl>
+                                </p:cBhvr>
+                              </p:animEffect>
+                            </p:childTnLst>
+                          </p:cTn>
+                        </p:par>
+                      </p:childTnLst>
+                    </p:cTn>
+                  </p:par>
+                </p:childTnLst>
+              </p:cTn>
+              <p:prevCondLst>
+                <p:cond evt="onPrev" delay="0">
+                  <p:tgtEl>
+                    <p:sldTgt/>
+                  </p:tgtEl>
+                </p:cond>
+              </p:prevCondLst>
+              <p:nextCondLst>
+                <p:cond evt="onNext" delay="0">
+                  <p:tgtEl>
+                    <p:sldTgt/>
+                  </p:tgtEl>
+                </p:cond>
+              </p:nextCondLst>
+            </p:seq>
+          </p:childTnLst>
+        </p:cTn>
+      </p:par>
+    </p:tnLst>
+  </p:timing>
 </p:sld>
 </file>
 
@@ -5234,6 +5684,96 @@
   <p:clrMapOvr>
     <a:masterClrMapping/>
   </p:clrMapOvr>
+  <p:timing>
+    <p:tnLst>
+      <p:par>
+        <p:cTn id="1" dur="indefinite" restart="never" nodeType="tmRoot">
+          <p:childTnLst>
+            <p:seq concurrent="true" nextAc="seek">
+              <p:cTn id="2" dur="indefinite" nodeType="mainSeq">
+                <p:childTnLst>
+                  <p:par>
+                    <p:cTn id="9" fill="hold">
+                      <p:stCondLst>
+                        <p:cond delay="0"/>
+                      </p:stCondLst>
+                      <p:childTnLst>
+                        <p:par>
+                          <p:cTn id="3" presetID="10" presetClass="entr" presetSubtype="0" fill="hold" nodeType="withEffect">
+                            <p:stCondLst>
+                              <p:cond delay="0"/>
+                            </p:stCondLst>
+                            <p:childTnLst>
+                              <p:animEffect transition="in" filter="fade">
+                                <p:cBhvr>
+                                  <p:cTn id="4" dur="450"/>
+                                  <p:tgtEl>
+                                    <p:spTgt spid="2"/>
+                                  </p:tgtEl>
+                                </p:cBhvr>
+                              </p:animEffect>
+                            </p:childTnLst>
+                          </p:cTn>
+                        </p:par>
+                        <p:par>
+                          <p:cTn id="5" presetID="10" presetClass="entr" presetSubtype="0" fill="hold" nodeType="withEffect">
+                            <p:stCondLst>
+                              <p:cond delay="200"/>
+                            </p:stCondLst>
+                            <p:childTnLst>
+                              <p:animEffect transition="in" filter="fade">
+                                <p:cBhvr>
+                                  <p:cTn id="6" dur="450"/>
+                                  <p:tgtEl>
+                                    <p:spTgt spid="3"/>
+                                  </p:tgtEl>
+                                </p:cBhvr>
+                              </p:animEffect>
+                            </p:childTnLst>
+                          </p:cTn>
+                        </p:par>
+                        <p:par>
+                          <p:cTn id="7" presetID="10" presetClass="entr" presetSubtype="0" fill="hold" nodeType="withEffect">
+                            <p:stCondLst>
+                              <p:cond delay="200"/>
+                            </p:stCondLst>
+                            <p:childTnLst>
+                              <p:animEffect transition="in" filter="fade">
+                                <p:cBhvr>
+                                  <p:cTn id="8" dur="450"/>
+                                  <p:tgtEl>
+                                    <p:spTgt spid="4"/>
+                                  </p:tgtEl>
+                                </p:cBhvr>
+                              </p:animEffect>
+                            </p:childTnLst>
+                          </p:cTn>
+                        </p:par>
+                      </p:childTnLst>
+                    </p:cTn>
+                  </p:par>
+                </p:childTnLst>
+              </p:cTn>
+              <p:prevCondLst>
+                <p:cond evt="onPrev" delay="0">
+                  <p:tgtEl>
+                    <p:sldTgt/>
+                  </p:tgtEl>
+                </p:cond>
+              </p:prevCondLst>
+              <p:nextCondLst>
+                <p:cond evt="onNext" delay="0">
+                  <p:tgtEl>
+                    <p:sldTgt/>
+                  </p:tgtEl>
+                </p:cond>
+              </p:nextCondLst>
+            </p:seq>
+          </p:childTnLst>
+        </p:cTn>
+      </p:par>
+    </p:tnLst>
+  </p:timing>
 </p:sld>
 </file>
 
@@ -5585,6 +6125,96 @@
   <p:clrMapOvr>
     <a:masterClrMapping/>
   </p:clrMapOvr>
+  <p:timing>
+    <p:tnLst>
+      <p:par>
+        <p:cTn id="1" dur="indefinite" restart="never" nodeType="tmRoot">
+          <p:childTnLst>
+            <p:seq concurrent="true" nextAc="seek">
+              <p:cTn id="2" dur="indefinite" nodeType="mainSeq">
+                <p:childTnLst>
+                  <p:par>
+                    <p:cTn id="9" fill="hold">
+                      <p:stCondLst>
+                        <p:cond delay="0"/>
+                      </p:stCondLst>
+                      <p:childTnLst>
+                        <p:par>
+                          <p:cTn id="3" presetID="10" presetClass="entr" presetSubtype="0" fill="hold" nodeType="withEffect">
+                            <p:stCondLst>
+                              <p:cond delay="0"/>
+                            </p:stCondLst>
+                            <p:childTnLst>
+                              <p:animEffect transition="in" filter="fade">
+                                <p:cBhvr>
+                                  <p:cTn id="4" dur="450"/>
+                                  <p:tgtEl>
+                                    <p:spTgt spid="2"/>
+                                  </p:tgtEl>
+                                </p:cBhvr>
+                              </p:animEffect>
+                            </p:childTnLst>
+                          </p:cTn>
+                        </p:par>
+                        <p:par>
+                          <p:cTn id="5" presetID="10" presetClass="entr" presetSubtype="0" fill="hold" nodeType="withEffect">
+                            <p:stCondLst>
+                              <p:cond delay="200"/>
+                            </p:stCondLst>
+                            <p:childTnLst>
+                              <p:animEffect transition="in" filter="fade">
+                                <p:cBhvr>
+                                  <p:cTn id="6" dur="450"/>
+                                  <p:tgtEl>
+                                    <p:spTgt spid="3"/>
+                                  </p:tgtEl>
+                                </p:cBhvr>
+                              </p:animEffect>
+                            </p:childTnLst>
+                          </p:cTn>
+                        </p:par>
+                        <p:par>
+                          <p:cTn id="7" presetID="10" presetClass="entr" presetSubtype="0" fill="hold" nodeType="withEffect">
+                            <p:stCondLst>
+                              <p:cond delay="200"/>
+                            </p:stCondLst>
+                            <p:childTnLst>
+                              <p:animEffect transition="in" filter="fade">
+                                <p:cBhvr>
+                                  <p:cTn id="8" dur="450"/>
+                                  <p:tgtEl>
+                                    <p:spTgt spid="4"/>
+                                  </p:tgtEl>
+                                </p:cBhvr>
+                              </p:animEffect>
+                            </p:childTnLst>
+                          </p:cTn>
+                        </p:par>
+                      </p:childTnLst>
+                    </p:cTn>
+                  </p:par>
+                </p:childTnLst>
+              </p:cTn>
+              <p:prevCondLst>
+                <p:cond evt="onPrev" delay="0">
+                  <p:tgtEl>
+                    <p:sldTgt/>
+                  </p:tgtEl>
+                </p:cond>
+              </p:prevCondLst>
+              <p:nextCondLst>
+                <p:cond evt="onNext" delay="0">
+                  <p:tgtEl>
+                    <p:sldTgt/>
+                  </p:tgtEl>
+                </p:cond>
+              </p:nextCondLst>
+            </p:seq>
+          </p:childTnLst>
+        </p:cTn>
+      </p:par>
+    </p:tnLst>
+  </p:timing>
 </p:sld>
 </file>
 
